--- a/docs/diagrams/cuga-flo-kogito-integration.pptx
+++ b/docs/diagrams/cuga-flo-kogito-integration.pptx
@@ -4260,7 +4260,7 @@
                 </a:solidFill>
                 <a:latin typeface="Calibri"/>
               </a:rPr>
-              <a:t>Outcome, and what the engine dictated</a:t>
+              <a:t>The CUGA FLO runtime inside the service</a:t>
             </a:r>
           </a:p>
         </p:txBody>
@@ -4318,7 +4318,7 @@
         <p:spPr>
           <a:xfrm>
             <a:off x="566928" y="1481328"/>
-            <a:ext cx="5394960" cy="274320"/>
+            <a:ext cx="11064240" cy="457200"/>
           </a:xfrm>
           <a:prstGeom prst="rect">
             <a:avLst/>
@@ -4337,326 +4337,128 @@
               </a:spcAft>
             </a:pPr>
             <a:r>
-              <a:rPr sz="1000" b="1" i="0">
+              <a:rPr sz="1250" b="0" i="0">
                 <a:solidFill>
                   <a:srgbClr val="667085"/>
                 </a:solidFill>
                 <a:latin typeface="Calibri"/>
               </a:rPr>
-              <a:t>ENGINE PARITY — SAME INPUTS, BOTH ENGINES</a:t>
-            </a:r>
-          </a:p>
-        </p:txBody>
-      </p:sp>
-      <p:graphicFrame>
-        <p:nvGraphicFramePr>
-          <p:cNvPr id="6" name="Table 5"/>
-          <p:cNvGraphicFramePr>
-            <a:graphicFrameLocks noGrp="1"/>
-          </p:cNvGraphicFramePr>
+              <a:t>Two Java classes are compiled into every generated Quarkus service. BPMN script tasks are one-liners delegating to them: CugaFlo reaches back to CUGA FLO for reasoning, and FlowRedirect applies the answer to the running process instance.</a:t>
+            </a:r>
+          </a:p>
+        </p:txBody>
+      </p:sp>
+      <p:sp>
+        <p:nvSpPr>
+          <p:cNvPr id="6" name="Rounded Rectangle 5"/>
+          <p:cNvSpPr/>
           <p:nvPr/>
-        </p:nvGraphicFramePr>
-        <p:xfrm>
-          <a:off x="566928" y="1810512"/>
-          <a:ext cx="5394960" cy="1463040"/>
-        </p:xfrm>
-        <a:graphic>
-          <a:graphicData uri="http://schemas.openxmlformats.org/drawingml/2006/table">
-            <a:tbl>
-              <a:tblPr firstRow="1" bandRow="1">
-                <a:tableStyleId>{5C22544A-7EE6-4342-B048-85BDC9FD1C3A}</a:tableStyleId>
-              </a:tblPr>
-              <a:tblGrid>
-                <a:gridCol w="1325880"/>
-                <a:gridCol w="2057400"/>
-                <a:gridCol w="2011680"/>
-              </a:tblGrid>
-              <a:tr h="365760">
-                <a:tc>
-                  <a:txBody>
-                    <a:bodyPr/>
-                    <a:lstStyle/>
-                    <a:p>
-                      <a:r>
-                        <a:rPr sz="1050" b="1">
-                          <a:solidFill>
-                            <a:srgbClr val="1A2332"/>
-                          </a:solidFill>
-                          <a:latin typeface="Calibri"/>
-                        </a:rPr>
-                        <a:t>Scenario</a:t>
-                      </a:r>
-                    </a:p>
-                  </a:txBody>
-                  <a:tcPr marL="82296" marR="82296" anchor="ctr">
-                    <a:solidFill>
-                      <a:srgbClr val="E6F2FF"/>
-                    </a:solidFill>
-                  </a:tcPr>
-                </a:tc>
-                <a:tc>
-                  <a:txBody>
-                    <a:bodyPr/>
-                    <a:lstStyle/>
-                    <a:p>
-                      <a:r>
-                        <a:rPr sz="1050" b="1">
-                          <a:solidFill>
-                            <a:srgbClr val="1A2332"/>
-                          </a:solidFill>
-                          <a:latin typeface="Calibri"/>
-                        </a:rPr>
-                        <a:t>Kogito</a:t>
-                      </a:r>
-                    </a:p>
-                  </a:txBody>
-                  <a:tcPr marL="82296" marR="82296" anchor="ctr">
-                    <a:solidFill>
-                      <a:srgbClr val="E6F2FF"/>
-                    </a:solidFill>
-                  </a:tcPr>
-                </a:tc>
-                <a:tc>
-                  <a:txBody>
-                    <a:bodyPr/>
-                    <a:lstStyle/>
-                    <a:p>
-                      <a:r>
-                        <a:rPr sz="1050" b="1">
-                          <a:solidFill>
-                            <a:srgbClr val="1A2332"/>
-                          </a:solidFill>
-                          <a:latin typeface="Calibri"/>
-                        </a:rPr>
-                        <a:t>Flowable</a:t>
-                      </a:r>
-                    </a:p>
-                  </a:txBody>
-                  <a:tcPr marL="82296" marR="82296" anchor="ctr">
-                    <a:solidFill>
-                      <a:srgbClr val="E6F2FF"/>
-                    </a:solidFill>
-                  </a:tcPr>
-                </a:tc>
-              </a:tr>
-              <a:tr h="365760">
-                <a:tc>
-                  <a:txBody>
-                    <a:bodyPr/>
-                    <a:lstStyle/>
-                    <a:p>
-                      <a:r>
-                        <a:rPr sz="1050" b="0">
-                          <a:solidFill>
-                            <a:srgbClr val="667085"/>
-                          </a:solidFill>
-                          <a:latin typeface="Calibri"/>
-                        </a:rPr>
-                        <a:t>approve</a:t>
-                      </a:r>
-                    </a:p>
-                  </a:txBody>
-                  <a:tcPr marL="82296" marR="82296" anchor="ctr">
-                    <a:solidFill>
-                      <a:srgbClr val="FFFFFF"/>
-                    </a:solidFill>
-                  </a:tcPr>
-                </a:tc>
-                <a:tc>
-                  <a:txBody>
-                    <a:bodyPr/>
-                    <a:lstStyle/>
-                    <a:p>
-                      <a:r>
-                        <a:rPr sz="1050" b="0">
-                          <a:solidFill>
-                            <a:srgbClr val="667085"/>
-                          </a:solidFill>
-                          <a:latin typeface="Calibri"/>
-                        </a:rPr>
-                        <a:t>0.905 → give loan</a:t>
-                      </a:r>
-                    </a:p>
-                  </a:txBody>
-                  <a:tcPr marL="82296" marR="82296" anchor="ctr">
-                    <a:solidFill>
-                      <a:srgbClr val="FFFFFF"/>
-                    </a:solidFill>
-                  </a:tcPr>
-                </a:tc>
-                <a:tc>
-                  <a:txBody>
-                    <a:bodyPr/>
-                    <a:lstStyle/>
-                    <a:p>
-                      <a:r>
-                        <a:rPr sz="1050" b="0">
-                          <a:solidFill>
-                            <a:srgbClr val="667085"/>
-                          </a:solidFill>
-                          <a:latin typeface="Calibri"/>
-                        </a:rPr>
-                        <a:t>0.887 → give loan</a:t>
-                      </a:r>
-                    </a:p>
-                  </a:txBody>
-                  <a:tcPr marL="82296" marR="82296" anchor="ctr">
-                    <a:solidFill>
-                      <a:srgbClr val="FFFFFF"/>
-                    </a:solidFill>
-                  </a:tcPr>
-                </a:tc>
-              </a:tr>
-              <a:tr h="365760">
-                <a:tc>
-                  <a:txBody>
-                    <a:bodyPr/>
-                    <a:lstStyle/>
-                    <a:p>
-                      <a:r>
-                        <a:rPr sz="1050" b="0">
-                          <a:solidFill>
-                            <a:srgbClr val="667085"/>
-                          </a:solidFill>
-                          <a:latin typeface="Calibri"/>
-                        </a:rPr>
-                        <a:t>reject</a:t>
-                      </a:r>
-                    </a:p>
-                  </a:txBody>
-                  <a:tcPr marL="82296" marR="82296" anchor="ctr">
-                    <a:solidFill>
-                      <a:srgbClr val="FFFFFF"/>
-                    </a:solidFill>
-                  </a:tcPr>
-                </a:tc>
-                <a:tc>
-                  <a:txBody>
-                    <a:bodyPr/>
-                    <a:lstStyle/>
-                    <a:p>
-                      <a:r>
-                        <a:rPr sz="1050" b="0">
-                          <a:solidFill>
-                            <a:srgbClr val="667085"/>
-                          </a:solidFill>
-                          <a:latin typeface="Calibri"/>
-                        </a:rPr>
-                        <a:t>0.38 → reject loan</a:t>
-                      </a:r>
-                    </a:p>
-                  </a:txBody>
-                  <a:tcPr marL="82296" marR="82296" anchor="ctr">
-                    <a:solidFill>
-                      <a:srgbClr val="FFFFFF"/>
-                    </a:solidFill>
-                  </a:tcPr>
-                </a:tc>
-                <a:tc>
-                  <a:txBody>
-                    <a:bodyPr/>
-                    <a:lstStyle/>
-                    <a:p>
-                      <a:r>
-                        <a:rPr sz="1050" b="0">
-                          <a:solidFill>
-                            <a:srgbClr val="667085"/>
-                          </a:solidFill>
-                          <a:latin typeface="Calibri"/>
-                        </a:rPr>
-                        <a:t>0.1875 → reject loan</a:t>
-                      </a:r>
-                    </a:p>
-                  </a:txBody>
-                  <a:tcPr marL="82296" marR="82296" anchor="ctr">
-                    <a:solidFill>
-                      <a:srgbClr val="FFFFFF"/>
-                    </a:solidFill>
-                  </a:tcPr>
-                </a:tc>
-              </a:tr>
-              <a:tr h="365760">
-                <a:tc>
-                  <a:txBody>
-                    <a:bodyPr/>
-                    <a:lstStyle/>
-                    <a:p>
-                      <a:r>
-                        <a:rPr sz="1050" b="0">
-                          <a:solidFill>
-                            <a:srgbClr val="667085"/>
-                          </a:solidFill>
-                          <a:latin typeface="Calibri"/>
-                        </a:rPr>
-                        <a:t>terminate</a:t>
-                      </a:r>
-                    </a:p>
-                  </a:txBody>
-                  <a:tcPr marL="82296" marR="82296" anchor="ctr">
-                    <a:solidFill>
-                      <a:srgbClr val="FFFFFF"/>
-                    </a:solidFill>
-                  </a:tcPr>
-                </a:tc>
-                <a:tc>
-                  <a:txBody>
-                    <a:bodyPr/>
-                    <a:lstStyle/>
-                    <a:p>
-                      <a:r>
-                        <a:rPr sz="1050" b="0">
-                          <a:solidFill>
-                            <a:srgbClr val="667085"/>
-                          </a:solidFill>
-                          <a:latin typeface="Calibri"/>
-                        </a:rPr>
-                        <a:t>halted at hook</a:t>
-                      </a:r>
-                    </a:p>
-                  </a:txBody>
-                  <a:tcPr marL="82296" marR="82296" anchor="ctr">
-                    <a:solidFill>
-                      <a:srgbClr val="FFFFFF"/>
-                    </a:solidFill>
-                  </a:tcPr>
-                </a:tc>
-                <a:tc>
-                  <a:txBody>
-                    <a:bodyPr/>
-                    <a:lstStyle/>
-                    <a:p>
-                      <a:r>
-                        <a:rPr sz="1050" b="0">
-                          <a:solidFill>
-                            <a:srgbClr val="667085"/>
-                          </a:solidFill>
-                          <a:latin typeface="Calibri"/>
-                        </a:rPr>
-                        <a:t>halted at hook</a:t>
-                      </a:r>
-                    </a:p>
-                  </a:txBody>
-                  <a:tcPr marL="82296" marR="82296" anchor="ctr">
-                    <a:solidFill>
-                      <a:srgbClr val="FFFFFF"/>
-                    </a:solidFill>
-                  </a:tcPr>
-                </a:tc>
-              </a:tr>
-            </a:tbl>
-          </a:graphicData>
-        </a:graphic>
-      </p:graphicFrame>
-      <p:sp>
-        <p:nvSpPr>
-          <p:cNvPr id="7" name="TextBox 6"/>
+        </p:nvSpPr>
+        <p:spPr>
+          <a:xfrm>
+            <a:off x="566928" y="2084831"/>
+            <a:ext cx="5394960" cy="2670048"/>
+          </a:xfrm>
+          <a:prstGeom prst="roundRect">
+            <a:avLst>
+              <a:gd name="adj" fmla="val 4500"/>
+            </a:avLst>
+          </a:prstGeom>
+          <a:solidFill>
+            <a:srgbClr val="FFFFFF"/>
+          </a:solidFill>
+          <a:ln w="15875">
+            <a:solidFill>
+              <a:srgbClr val="3B7DD8"/>
+            </a:solidFill>
+          </a:ln>
+          <a:effectLst/>
+        </p:spPr>
+        <p:style>
+          <a:lnRef idx="1">
+            <a:schemeClr val="accent1"/>
+          </a:lnRef>
+          <a:fillRef idx="3">
+            <a:schemeClr val="accent1"/>
+          </a:fillRef>
+          <a:effectRef idx="2">
+            <a:schemeClr val="accent1"/>
+          </a:effectRef>
+          <a:fontRef idx="minor">
+            <a:schemeClr val="lt1"/>
+          </a:fontRef>
+        </p:style>
+        <p:txBody>
+          <a:bodyPr rtlCol="0" anchor="ctr"/>
+          <a:lstStyle/>
+          <a:p>
+            <a:pPr algn="ctr"/>
+          </a:p>
+        </p:txBody>
+      </p:sp>
+      <p:sp>
+        <p:nvSpPr>
+          <p:cNvPr id="7" name="Rounded Rectangle 6"/>
+          <p:cNvSpPr/>
+          <p:nvPr/>
+        </p:nvSpPr>
+        <p:spPr>
+          <a:xfrm>
+            <a:off x="841247" y="2322576"/>
+            <a:ext cx="2148840" cy="329184"/>
+          </a:xfrm>
+          <a:prstGeom prst="roundRect">
+            <a:avLst/>
+          </a:prstGeom>
+          <a:solidFill>
+            <a:srgbClr val="E6F2FF"/>
+          </a:solidFill>
+          <a:ln>
+            <a:noFill/>
+          </a:ln>
+          <a:effectLst/>
+        </p:spPr>
+        <p:style>
+          <a:lnRef idx="1">
+            <a:schemeClr val="accent1"/>
+          </a:lnRef>
+          <a:fillRef idx="3">
+            <a:schemeClr val="accent1"/>
+          </a:fillRef>
+          <a:effectRef idx="2">
+            <a:schemeClr val="accent1"/>
+          </a:effectRef>
+          <a:fontRef idx="minor">
+            <a:schemeClr val="lt1"/>
+          </a:fontRef>
+        </p:style>
+        <p:txBody>
+          <a:bodyPr rtlCol="0" anchor="ctr"/>
+          <a:lstStyle/>
+          <a:p>
+            <a:pPr algn="ctr"/>
+            <a:r>
+              <a:rPr sz="1200" b="1">
+                <a:solidFill>
+                  <a:srgbClr val="3B7DD8"/>
+                </a:solidFill>
+                <a:latin typeface="Consolas"/>
+              </a:rPr>
+              <a:t>CugaFlo.java</a:t>
+            </a:r>
+          </a:p>
+        </p:txBody>
+      </p:sp>
+      <p:sp>
+        <p:nvSpPr>
+          <p:cNvPr id="8" name="TextBox 7"/>
           <p:cNvSpPr txBox="1"/>
           <p:nvPr/>
         </p:nvSpPr>
         <p:spPr>
           <a:xfrm>
-            <a:off x="566928" y="3401568"/>
-            <a:ext cx="5394960" cy="548640"/>
+            <a:off x="3108960" y="2377439"/>
+            <a:ext cx="2606040" cy="274320"/>
           </a:xfrm>
           <a:prstGeom prst="rect">
             <a:avLst/>
@@ -4675,27 +4477,27 @@
               </a:spcAft>
             </a:pPr>
             <a:r>
-              <a:rPr sz="1000" b="0" i="1">
+              <a:rPr sz="1050" b="0" i="0">
                 <a:solidFill>
                   <a:srgbClr val="667085"/>
                 </a:solidFill>
                 <a:latin typeface="Calibri"/>
               </a:rPr>
-              <a:t>Score differences are LLM nondeterminism, not engine behaviour — both land the same side of the gateway threshold every time.</a:t>
-            </a:r>
-          </a:p>
-        </p:txBody>
-      </p:sp>
-      <p:sp>
-        <p:nvSpPr>
-          <p:cNvPr id="8" name="TextBox 7"/>
+              <a:t>the MCP client</a:t>
+            </a:r>
+          </a:p>
+        </p:txBody>
+      </p:sp>
+      <p:sp>
+        <p:nvSpPr>
+          <p:cNvPr id="9" name="TextBox 8"/>
           <p:cNvSpPr txBox="1"/>
           <p:nvPr/>
         </p:nvSpPr>
         <p:spPr>
           <a:xfrm>
-            <a:off x="6400800" y="1481328"/>
-            <a:ext cx="5230368" cy="274320"/>
+            <a:off x="841247" y="2834639"/>
+            <a:ext cx="146304" cy="219456"/>
           </a:xfrm>
           <a:prstGeom prst="rect">
             <a:avLst/>
@@ -4714,27 +4516,27 @@
               </a:spcAft>
             </a:pPr>
             <a:r>
-              <a:rPr sz="1000" b="1" i="0">
-                <a:solidFill>
-                  <a:srgbClr val="667085"/>
+              <a:rPr sz="1000" b="0" i="0">
+                <a:solidFill>
+                  <a:srgbClr val="3B7DD8"/>
                 </a:solidFill>
                 <a:latin typeface="Calibri"/>
               </a:rPr>
-              <a:t>WHAT KOGITO FORCED</a:t>
-            </a:r>
-          </a:p>
-        </p:txBody>
-      </p:sp>
-      <p:sp>
-        <p:nvSpPr>
-          <p:cNvPr id="9" name="TextBox 8"/>
+              <a:t>▪</a:t>
+            </a:r>
+          </a:p>
+        </p:txBody>
+      </p:sp>
+      <p:sp>
+        <p:nvSpPr>
+          <p:cNvPr id="10" name="TextBox 9"/>
           <p:cNvSpPr txBox="1"/>
           <p:nvPr/>
         </p:nvSpPr>
         <p:spPr>
           <a:xfrm>
-            <a:off x="6400800" y="1810512"/>
-            <a:ext cx="5230368" cy="219456"/>
+            <a:off x="1069848" y="2825496"/>
+            <a:ext cx="4572000" cy="402336"/>
           </a:xfrm>
           <a:prstGeom prst="rect">
             <a:avLst/>
@@ -4753,38 +4555,15 @@
               </a:spcAft>
             </a:pPr>
             <a:r>
-              <a:rPr sz="1100" b="1" i="0">
+              <a:rPr sz="1050" b="0" i="0">
                 <a:solidFill>
                   <a:srgbClr val="1A2332"/>
                 </a:solidFill>
                 <a:latin typeface="Calibri"/>
               </a:rPr>
-              <a:t>▪  No boundary events on script tasks</a:t>
-            </a:r>
-          </a:p>
-        </p:txBody>
-      </p:sp>
-      <p:sp>
-        <p:nvSpPr>
-          <p:cNvPr id="10" name="TextBox 9"/>
-          <p:cNvSpPr txBox="1"/>
-          <p:nvPr/>
-        </p:nvSpPr>
-        <p:spPr>
-          <a:xfrm>
-            <a:off x="6601968" y="2048256"/>
-            <a:ext cx="5029200" cy="457200"/>
-          </a:xfrm>
-          <a:prstGeom prst="rect">
-            <a:avLst/>
-          </a:prstGeom>
-          <a:noFill/>
-        </p:spPr>
-        <p:txBody>
-          <a:bodyPr wrap="square" lIns="0" rIns="0" tIns="0" bIns="0">
-            <a:spAutoFit/>
-          </a:bodyPr>
-          <a:lstStyle/>
+              <a:t>Calls execute_task · route_gateway ·</a:t>
+            </a:r>
+          </a:p>
           <a:p>
             <a:pPr algn="l">
               <a:spcAft>
@@ -4792,15 +4571,38 @@
               </a:spcAft>
             </a:pPr>
             <a:r>
-              <a:rPr sz="950" b="0" i="0">
-                <a:solidFill>
-                  <a:srgbClr val="667085"/>
+              <a:rPr sz="1050" b="0" i="0">
+                <a:solidFill>
+                  <a:srgbClr val="1A2332"/>
                 </a:solidFill>
                 <a:latin typeface="Calibri"/>
               </a:rPr>
-              <a:t>Flowable's hook triad cannot be ported. FlowRedirect jumps from the</a:t>
-            </a:r>
-          </a:p>
+              <a:t>evaluate_hook · complete_process</a:t>
+            </a:r>
+          </a:p>
+        </p:txBody>
+      </p:sp>
+      <p:sp>
+        <p:nvSpPr>
+          <p:cNvPr id="11" name="TextBox 10"/>
+          <p:cNvSpPr txBox="1"/>
+          <p:nvPr/>
+        </p:nvSpPr>
+        <p:spPr>
+          <a:xfrm>
+            <a:off x="841247" y="3401568"/>
+            <a:ext cx="146304" cy="219456"/>
+          </a:xfrm>
+          <a:prstGeom prst="rect">
+            <a:avLst/>
+          </a:prstGeom>
+          <a:noFill/>
+        </p:spPr>
+        <p:txBody>
+          <a:bodyPr wrap="square" lIns="0" rIns="0" tIns="0" bIns="0">
+            <a:spAutoFit/>
+          </a:bodyPr>
+          <a:lstStyle/>
           <a:p>
             <a:pPr algn="l">
               <a:spcAft>
@@ -4808,27 +4610,27 @@
               </a:spcAft>
             </a:pPr>
             <a:r>
-              <a:rPr sz="950" b="0" i="0">
-                <a:solidFill>
-                  <a:srgbClr val="667085"/>
+              <a:rPr sz="1000" b="0" i="0">
+                <a:solidFill>
+                  <a:srgbClr val="3B7DD8"/>
                 </a:solidFill>
                 <a:latin typeface="Calibri"/>
               </a:rPr>
-              <a:t>script task itself — fewer moving parts than Flowable.</a:t>
-            </a:r>
-          </a:p>
-        </p:txBody>
-      </p:sp>
-      <p:sp>
-        <p:nvSpPr>
-          <p:cNvPr id="11" name="TextBox 10"/>
+              <a:t>▪</a:t>
+            </a:r>
+          </a:p>
+        </p:txBody>
+      </p:sp>
+      <p:sp>
+        <p:nvSpPr>
+          <p:cNvPr id="12" name="TextBox 11"/>
           <p:cNvSpPr txBox="1"/>
           <p:nvPr/>
         </p:nvSpPr>
         <p:spPr>
           <a:xfrm>
-            <a:off x="6400800" y="2670048"/>
-            <a:ext cx="5230368" cy="219456"/>
+            <a:off x="1069848" y="3392424"/>
+            <a:ext cx="4572000" cy="402336"/>
           </a:xfrm>
           <a:prstGeom prst="rect">
             <a:avLst/>
@@ -4847,27 +4649,27 @@
               </a:spcAft>
             </a:pPr>
             <a:r>
-              <a:rPr sz="1100" b="1" i="0">
+              <a:rPr sz="1050" b="0" i="0">
                 <a:solidFill>
                   <a:srgbClr val="1A2332"/>
                 </a:solidFill>
                 <a:latin typeface="Calibri"/>
               </a:rPr>
-              <a:t>▪  No Java FQNs inside scripts</a:t>
-            </a:r>
-          </a:p>
-        </p:txBody>
-      </p:sp>
-      <p:sp>
-        <p:nvSpPr>
-          <p:cNvPr id="12" name="TextBox 11"/>
+              <a:t>Ships the full process-variable map on every call</a:t>
+            </a:r>
+          </a:p>
+        </p:txBody>
+      </p:sp>
+      <p:sp>
+        <p:nvSpPr>
+          <p:cNvPr id="13" name="TextBox 12"/>
           <p:cNvSpPr txBox="1"/>
           <p:nvPr/>
         </p:nvSpPr>
         <p:spPr>
           <a:xfrm>
-            <a:off x="6601968" y="2907791"/>
-            <a:ext cx="5029200" cy="457200"/>
+            <a:off x="841247" y="3785615"/>
+            <a:ext cx="146304" cy="219456"/>
           </a:xfrm>
           <a:prstGeom prst="rect">
             <a:avLst/>
@@ -4886,15 +4688,38 @@
               </a:spcAft>
             </a:pPr>
             <a:r>
-              <a:rPr sz="950" b="0" i="0">
-                <a:solidFill>
-                  <a:srgbClr val="667085"/>
+              <a:rPr sz="1000" b="0" i="0">
+                <a:solidFill>
+                  <a:srgbClr val="3B7DD8"/>
                 </a:solidFill>
                 <a:latin typeface="Calibri"/>
               </a:rPr>
-              <a:t>Scripts are one-liners delegating to CugaFlo.java and FlowRedirect.java,</a:t>
-            </a:r>
-          </a:p>
+              <a:t>▪</a:t>
+            </a:r>
+          </a:p>
+        </p:txBody>
+      </p:sp>
+      <p:sp>
+        <p:nvSpPr>
+          <p:cNvPr id="14" name="TextBox 13"/>
+          <p:cNvSpPr txBox="1"/>
+          <p:nvPr/>
+        </p:nvSpPr>
+        <p:spPr>
+          <a:xfrm>
+            <a:off x="1069848" y="3776472"/>
+            <a:ext cx="4572000" cy="402336"/>
+          </a:xfrm>
+          <a:prstGeom prst="rect">
+            <a:avLst/>
+          </a:prstGeom>
+          <a:noFill/>
+        </p:spPr>
+        <p:txBody>
+          <a:bodyPr wrap="square" lIns="0" rIns="0" tIns="0" bIns="0">
+            <a:spAutoFit/>
+          </a:bodyPr>
+          <a:lstStyle/>
           <a:p>
             <a:pPr algn="l">
               <a:spcAft>
@@ -4902,27 +4727,27 @@
               </a:spcAft>
             </a:pPr>
             <a:r>
-              <a:rPr sz="950" b="0" i="0">
-                <a:solidFill>
-                  <a:srgbClr val="667085"/>
+              <a:rPr sz="1050" b="0" i="0">
+                <a:solidFill>
+                  <a:srgbClr val="1A2332"/>
                 </a:solidFill>
                 <a:latin typeface="Calibri"/>
               </a:rPr>
-              <a:t>compiled into the service.</a:t>
-            </a:r>
-          </a:p>
-        </p:txBody>
-      </p:sp>
-      <p:sp>
-        <p:nvSpPr>
-          <p:cNvPr id="13" name="TextBox 12"/>
+              <a:t>Endpoint from the cugaMcpUrl variable, never hardcoded</a:t>
+            </a:r>
+          </a:p>
+        </p:txBody>
+      </p:sp>
+      <p:sp>
+        <p:nvSpPr>
+          <p:cNvPr id="15" name="TextBox 14"/>
           <p:cNvSpPr txBox="1"/>
           <p:nvPr/>
         </p:nvSpPr>
         <p:spPr>
           <a:xfrm>
-            <a:off x="6400800" y="3529584"/>
-            <a:ext cx="5230368" cy="219456"/>
+            <a:off x="841247" y="4169663"/>
+            <a:ext cx="146304" cy="219456"/>
           </a:xfrm>
           <a:prstGeom prst="rect">
             <a:avLst/>
@@ -4941,27 +4766,27 @@
               </a:spcAft>
             </a:pPr>
             <a:r>
-              <a:rPr sz="1100" b="1" i="0">
-                <a:solidFill>
-                  <a:srgbClr val="1A2332"/>
+              <a:rPr sz="1000" b="0" i="0">
+                <a:solidFill>
+                  <a:srgbClr val="3B7DD8"/>
                 </a:solidFill>
                 <a:latin typeface="Calibri"/>
               </a:rPr>
-              <a:t>▪  Every variable must be declared</a:t>
-            </a:r>
-          </a:p>
-        </p:txBody>
-      </p:sp>
-      <p:sp>
-        <p:nvSpPr>
-          <p:cNvPr id="14" name="TextBox 13"/>
+              <a:t>▪</a:t>
+            </a:r>
+          </a:p>
+        </p:txBody>
+      </p:sp>
+      <p:sp>
+        <p:nvSpPr>
+          <p:cNvPr id="16" name="TextBox 15"/>
           <p:cNvSpPr txBox="1"/>
           <p:nvPr/>
         </p:nvSpPr>
         <p:spPr>
           <a:xfrm>
-            <a:off x="6601968" y="3767328"/>
-            <a:ext cx="5029200" cy="457200"/>
+            <a:off x="1069848" y="4160520"/>
+            <a:ext cx="4572000" cy="402336"/>
           </a:xfrm>
           <a:prstGeom prst="rect">
             <a:avLst/>
@@ -4980,15 +4805,139 @@
               </a:spcAft>
             </a:pPr>
             <a:r>
-              <a:rPr sz="950" b="0" i="0">
-                <a:solidFill>
-                  <a:srgbClr val="667085"/>
+              <a:rPr sz="1050" b="0" i="0">
+                <a:solidFill>
+                  <a:srgbClr val="1A2332"/>
                 </a:solidFill>
                 <a:latin typeface="Calibri"/>
               </a:rPr>
-              <a:t>The process model is generated and strongly typed; undeclared names</a:t>
-            </a:r>
-          </a:p>
+              <a:t>Writes results back into typed process variables</a:t>
+            </a:r>
+          </a:p>
+        </p:txBody>
+      </p:sp>
+      <p:sp>
+        <p:nvSpPr>
+          <p:cNvPr id="17" name="Rounded Rectangle 16"/>
+          <p:cNvSpPr/>
+          <p:nvPr/>
+        </p:nvSpPr>
+        <p:spPr>
+          <a:xfrm>
+            <a:off x="6236208" y="2084831"/>
+            <a:ext cx="5394960" cy="2670048"/>
+          </a:xfrm>
+          <a:prstGeom prst="roundRect">
+            <a:avLst>
+              <a:gd name="adj" fmla="val 4500"/>
+            </a:avLst>
+          </a:prstGeom>
+          <a:solidFill>
+            <a:srgbClr val="FFFFFF"/>
+          </a:solidFill>
+          <a:ln w="15875">
+            <a:solidFill>
+              <a:srgbClr val="3BA55D"/>
+            </a:solidFill>
+          </a:ln>
+          <a:effectLst/>
+        </p:spPr>
+        <p:style>
+          <a:lnRef idx="1">
+            <a:schemeClr val="accent1"/>
+          </a:lnRef>
+          <a:fillRef idx="3">
+            <a:schemeClr val="accent1"/>
+          </a:fillRef>
+          <a:effectRef idx="2">
+            <a:schemeClr val="accent1"/>
+          </a:effectRef>
+          <a:fontRef idx="minor">
+            <a:schemeClr val="lt1"/>
+          </a:fontRef>
+        </p:style>
+        <p:txBody>
+          <a:bodyPr rtlCol="0" anchor="ctr"/>
+          <a:lstStyle/>
+          <a:p>
+            <a:pPr algn="ctr"/>
+          </a:p>
+        </p:txBody>
+      </p:sp>
+      <p:sp>
+        <p:nvSpPr>
+          <p:cNvPr id="18" name="Rounded Rectangle 17"/>
+          <p:cNvSpPr/>
+          <p:nvPr/>
+        </p:nvSpPr>
+        <p:spPr>
+          <a:xfrm>
+            <a:off x="6510528" y="2322576"/>
+            <a:ext cx="2148840" cy="329184"/>
+          </a:xfrm>
+          <a:prstGeom prst="roundRect">
+            <a:avLst/>
+          </a:prstGeom>
+          <a:solidFill>
+            <a:srgbClr val="E9F7EC"/>
+          </a:solidFill>
+          <a:ln>
+            <a:noFill/>
+          </a:ln>
+          <a:effectLst/>
+        </p:spPr>
+        <p:style>
+          <a:lnRef idx="1">
+            <a:schemeClr val="accent1"/>
+          </a:lnRef>
+          <a:fillRef idx="3">
+            <a:schemeClr val="accent1"/>
+          </a:fillRef>
+          <a:effectRef idx="2">
+            <a:schemeClr val="accent1"/>
+          </a:effectRef>
+          <a:fontRef idx="minor">
+            <a:schemeClr val="lt1"/>
+          </a:fontRef>
+        </p:style>
+        <p:txBody>
+          <a:bodyPr rtlCol="0" anchor="ctr"/>
+          <a:lstStyle/>
+          <a:p>
+            <a:pPr algn="ctr"/>
+            <a:r>
+              <a:rPr sz="1200" b="1">
+                <a:solidFill>
+                  <a:srgbClr val="3BA55D"/>
+                </a:solidFill>
+                <a:latin typeface="Consolas"/>
+              </a:rPr>
+              <a:t>FlowRedirect.java</a:t>
+            </a:r>
+          </a:p>
+        </p:txBody>
+      </p:sp>
+      <p:sp>
+        <p:nvSpPr>
+          <p:cNvPr id="19" name="TextBox 18"/>
+          <p:cNvSpPr txBox="1"/>
+          <p:nvPr/>
+        </p:nvSpPr>
+        <p:spPr>
+          <a:xfrm>
+            <a:off x="8778240" y="2377439"/>
+            <a:ext cx="2606040" cy="274320"/>
+          </a:xfrm>
+          <a:prstGeom prst="rect">
+            <a:avLst/>
+          </a:prstGeom>
+          <a:noFill/>
+        </p:spPr>
+        <p:txBody>
+          <a:bodyPr wrap="square" lIns="0" rIns="0" tIns="0" bIns="0">
+            <a:spAutoFit/>
+          </a:bodyPr>
+          <a:lstStyle/>
           <a:p>
             <a:pPr algn="l">
               <a:spcAft>
@@ -4996,27 +4945,27 @@
               </a:spcAft>
             </a:pPr>
             <a:r>
-              <a:rPr sz="950" b="0" i="0">
+              <a:rPr sz="1050" b="0" i="0">
                 <a:solidFill>
                   <a:srgbClr val="667085"/>
                 </a:solidFill>
                 <a:latin typeface="Calibri"/>
               </a:rPr>
-              <a:t>are dropped silently.</a:t>
-            </a:r>
-          </a:p>
-        </p:txBody>
-      </p:sp>
-      <p:sp>
-        <p:nvSpPr>
-          <p:cNvPr id="15" name="TextBox 14"/>
+              <a:t>the in-process jump</a:t>
+            </a:r>
+          </a:p>
+        </p:txBody>
+      </p:sp>
+      <p:sp>
+        <p:nvSpPr>
+          <p:cNvPr id="20" name="TextBox 19"/>
           <p:cNvSpPr txBox="1"/>
           <p:nvPr/>
         </p:nvSpPr>
         <p:spPr>
           <a:xfrm>
-            <a:off x="6400800" y="4389120"/>
-            <a:ext cx="5230368" cy="219456"/>
+            <a:off x="6510528" y="2834639"/>
+            <a:ext cx="146304" cy="219456"/>
           </a:xfrm>
           <a:prstGeom prst="rect">
             <a:avLst/>
@@ -5035,27 +4984,27 @@
               </a:spcAft>
             </a:pPr>
             <a:r>
-              <a:rPr sz="1100" b="1" i="0">
-                <a:solidFill>
-                  <a:srgbClr val="1A2332"/>
+              <a:rPr sz="1000" b="0" i="0">
+                <a:solidFill>
+                  <a:srgbClr val="3BA55D"/>
                 </a:solidFill>
                 <a:latin typeface="Calibri"/>
               </a:rPr>
-              <a:t>▪  No history without Data Index</a:t>
-            </a:r>
-          </a:p>
-        </p:txBody>
-      </p:sp>
-      <p:sp>
-        <p:nvSpPr>
-          <p:cNvPr id="16" name="TextBox 15"/>
+              <a:t>▪</a:t>
+            </a:r>
+          </a:p>
+        </p:txBody>
+      </p:sp>
+      <p:sp>
+        <p:nvSpPr>
+          <p:cNvPr id="21" name="TextBox 20"/>
           <p:cNvSpPr txBox="1"/>
           <p:nvPr/>
         </p:nvSpPr>
         <p:spPr>
           <a:xfrm>
-            <a:off x="6601968" y="4626864"/>
-            <a:ext cx="5029200" cy="457200"/>
+            <a:off x="6739128" y="2825496"/>
+            <a:ext cx="4572000" cy="402336"/>
           </a:xfrm>
           <a:prstGeom prst="rect">
             <a:avLst/>
@@ -5074,38 +5023,15 @@
               </a:spcAft>
             </a:pPr>
             <a:r>
-              <a:rPr sz="950" b="0" i="0">
-                <a:solidFill>
-                  <a:srgbClr val="667085"/>
+              <a:rPr sz="1050" b="0" i="0">
+                <a:solidFill>
+                  <a:srgbClr val="1A2332"/>
                 </a:solidFill>
                 <a:latin typeface="Calibri"/>
               </a:rPr>
-              <a:t>An embedded Data Index exposes each run over GraphQL, node by node.</a:t>
-            </a:r>
-          </a:p>
-        </p:txBody>
-      </p:sp>
-      <p:sp>
-        <p:nvSpPr>
-          <p:cNvPr id="17" name="TextBox 16"/>
-          <p:cNvSpPr txBox="1"/>
-          <p:nvPr/>
-        </p:nvSpPr>
-        <p:spPr>
-          <a:xfrm>
-            <a:off x="566928" y="4133087"/>
-            <a:ext cx="5394960" cy="274320"/>
-          </a:xfrm>
-          <a:prstGeom prst="rect">
-            <a:avLst/>
-          </a:prstGeom>
-          <a:noFill/>
-        </p:spPr>
-        <p:txBody>
-          <a:bodyPr wrap="square" lIns="0" rIns="0" tIns="0" bIns="0">
-            <a:spAutoFit/>
-          </a:bodyPr>
-          <a:lstStyle/>
+              <a:t>Kogito's answer to Flowable's</a:t>
+            </a:r>
+          </a:p>
           <a:p>
             <a:pPr algn="l">
               <a:spcAft>
@@ -5113,27 +5039,300 @@
               </a:spcAft>
             </a:pPr>
             <a:r>
-              <a:rPr sz="1000" b="1" i="0">
-                <a:solidFill>
-                  <a:srgbClr val="667085"/>
+              <a:rPr sz="1050" b="0" i="0">
+                <a:solidFill>
+                  <a:srgbClr val="1A2332"/>
                 </a:solidFill>
                 <a:latin typeface="Calibri"/>
               </a:rPr>
-              <a:t>BUILD AND RUN</a:t>
-            </a:r>
-          </a:p>
-        </p:txBody>
-      </p:sp>
-      <p:sp>
-        <p:nvSpPr>
-          <p:cNvPr id="18" name="Rounded Rectangle 17"/>
+              <a:t>ChangeActivityStateBuilder</a:t>
+            </a:r>
+          </a:p>
+        </p:txBody>
+      </p:sp>
+      <p:sp>
+        <p:nvSpPr>
+          <p:cNvPr id="22" name="TextBox 21"/>
+          <p:cNvSpPr txBox="1"/>
+          <p:nvPr/>
+        </p:nvSpPr>
+        <p:spPr>
+          <a:xfrm>
+            <a:off x="6510528" y="3401568"/>
+            <a:ext cx="146304" cy="219456"/>
+          </a:xfrm>
+          <a:prstGeom prst="rect">
+            <a:avLst/>
+          </a:prstGeom>
+          <a:noFill/>
+        </p:spPr>
+        <p:txBody>
+          <a:bodyPr wrap="square" lIns="0" rIns="0" tIns="0" bIns="0">
+            <a:spAutoFit/>
+          </a:bodyPr>
+          <a:lstStyle/>
+          <a:p>
+            <a:pPr algn="l">
+              <a:spcAft>
+                <a:spcPts val="0"/>
+              </a:spcAft>
+            </a:pPr>
+            <a:r>
+              <a:rPr sz="1000" b="0" i="0">
+                <a:solidFill>
+                  <a:srgbClr val="3BA55D"/>
+                </a:solidFill>
+                <a:latin typeface="Calibri"/>
+              </a:rPr>
+              <a:t>▪</a:t>
+            </a:r>
+          </a:p>
+        </p:txBody>
+      </p:sp>
+      <p:sp>
+        <p:nvSpPr>
+          <p:cNvPr id="23" name="TextBox 22"/>
+          <p:cNvSpPr txBox="1"/>
+          <p:nvPr/>
+        </p:nvSpPr>
+        <p:spPr>
+          <a:xfrm>
+            <a:off x="6739128" y="3392424"/>
+            <a:ext cx="4572000" cy="402336"/>
+          </a:xfrm>
+          <a:prstGeom prst="rect">
+            <a:avLst/>
+          </a:prstGeom>
+          <a:noFill/>
+        </p:spPr>
+        <p:txBody>
+          <a:bodyPr wrap="square" lIns="0" rIns="0" tIns="0" bIns="0">
+            <a:spAutoFit/>
+          </a:bodyPr>
+          <a:lstStyle/>
+          <a:p>
+            <a:pPr algn="l">
+              <a:spcAft>
+                <a:spcPts val="0"/>
+              </a:spcAft>
+            </a:pPr>
+            <a:r>
+              <a:rPr sz="1050" b="0" i="0">
+                <a:solidFill>
+                  <a:srgbClr val="1A2332"/>
+                </a:solidFill>
+                <a:latin typeface="Calibri"/>
+              </a:rPr>
+              <a:t>Cancels the calling node, then triggers the target</a:t>
+            </a:r>
+          </a:p>
+        </p:txBody>
+      </p:sp>
+      <p:sp>
+        <p:nvSpPr>
+          <p:cNvPr id="24" name="TextBox 23"/>
+          <p:cNvSpPr txBox="1"/>
+          <p:nvPr/>
+        </p:nvSpPr>
+        <p:spPr>
+          <a:xfrm>
+            <a:off x="6510528" y="3785615"/>
+            <a:ext cx="146304" cy="219456"/>
+          </a:xfrm>
+          <a:prstGeom prst="rect">
+            <a:avLst/>
+          </a:prstGeom>
+          <a:noFill/>
+        </p:spPr>
+        <p:txBody>
+          <a:bodyPr wrap="square" lIns="0" rIns="0" tIns="0" bIns="0">
+            <a:spAutoFit/>
+          </a:bodyPr>
+          <a:lstStyle/>
+          <a:p>
+            <a:pPr algn="l">
+              <a:spcAft>
+                <a:spcPts val="0"/>
+              </a:spcAft>
+            </a:pPr>
+            <a:r>
+              <a:rPr sz="1000" b="0" i="0">
+                <a:solidFill>
+                  <a:srgbClr val="3BA55D"/>
+                </a:solidFill>
+                <a:latin typeface="Calibri"/>
+              </a:rPr>
+              <a:t>▪</a:t>
+            </a:r>
+          </a:p>
+        </p:txBody>
+      </p:sp>
+      <p:sp>
+        <p:nvSpPr>
+          <p:cNvPr id="25" name="TextBox 24"/>
+          <p:cNvSpPr txBox="1"/>
+          <p:nvPr/>
+        </p:nvSpPr>
+        <p:spPr>
+          <a:xfrm>
+            <a:off x="6739128" y="3776472"/>
+            <a:ext cx="4572000" cy="402336"/>
+          </a:xfrm>
+          <a:prstGeom prst="rect">
+            <a:avLst/>
+          </a:prstGeom>
+          <a:noFill/>
+        </p:spPr>
+        <p:txBody>
+          <a:bodyPr wrap="square" lIns="0" rIns="0" tIns="0" bIns="0">
+            <a:spAutoFit/>
+          </a:bodyPr>
+          <a:lstStyle/>
+          <a:p>
+            <a:pPr algn="l">
+              <a:spcAft>
+                <a:spcPts val="0"/>
+              </a:spcAft>
+            </a:pPr>
+            <a:r>
+              <a:rPr sz="1050" b="0" i="0">
+                <a:solidFill>
+                  <a:srgbClr val="1A2332"/>
+                </a:solidFill>
+                <a:latin typeface="Calibri"/>
+              </a:rPr>
+              <a:t>Self-cancel is load-bearing — else both paths run</a:t>
+            </a:r>
+          </a:p>
+        </p:txBody>
+      </p:sp>
+      <p:sp>
+        <p:nvSpPr>
+          <p:cNvPr id="26" name="TextBox 25"/>
+          <p:cNvSpPr txBox="1"/>
+          <p:nvPr/>
+        </p:nvSpPr>
+        <p:spPr>
+          <a:xfrm>
+            <a:off x="6510528" y="4169663"/>
+            <a:ext cx="146304" cy="219456"/>
+          </a:xfrm>
+          <a:prstGeom prst="rect">
+            <a:avLst/>
+          </a:prstGeom>
+          <a:noFill/>
+        </p:spPr>
+        <p:txBody>
+          <a:bodyPr wrap="square" lIns="0" rIns="0" tIns="0" bIns="0">
+            <a:spAutoFit/>
+          </a:bodyPr>
+          <a:lstStyle/>
+          <a:p>
+            <a:pPr algn="l">
+              <a:spcAft>
+                <a:spcPts val="0"/>
+              </a:spcAft>
+            </a:pPr>
+            <a:r>
+              <a:rPr sz="1000" b="0" i="0">
+                <a:solidFill>
+                  <a:srgbClr val="3BA55D"/>
+                </a:solidFill>
+                <a:latin typeface="Calibri"/>
+              </a:rPr>
+              <a:t>▪</a:t>
+            </a:r>
+          </a:p>
+        </p:txBody>
+      </p:sp>
+      <p:sp>
+        <p:nvSpPr>
+          <p:cNvPr id="27" name="TextBox 26"/>
+          <p:cNvSpPr txBox="1"/>
+          <p:nvPr/>
+        </p:nvSpPr>
+        <p:spPr>
+          <a:xfrm>
+            <a:off x="6739128" y="4160520"/>
+            <a:ext cx="4572000" cy="402336"/>
+          </a:xfrm>
+          <a:prstGeom prst="rect">
+            <a:avLst/>
+          </a:prstGeom>
+          <a:noFill/>
+        </p:spPr>
+        <p:txBody>
+          <a:bodyPr wrap="square" lIns="0" rIns="0" tIns="0" bIns="0">
+            <a:spAutoFit/>
+          </a:bodyPr>
+          <a:lstStyle/>
+          <a:p>
+            <a:pPr algn="l">
+              <a:spcAft>
+                <a:spcPts val="0"/>
+              </a:spcAft>
+            </a:pPr>
+            <a:r>
+              <a:rPr sz="1050" b="0" i="0">
+                <a:solidFill>
+                  <a:srgbClr val="1A2332"/>
+                </a:solidFill>
+                <a:latin typeface="Calibri"/>
+              </a:rPr>
+              <a:t>SKIP_TO → target · TERMINATE → completion task</a:t>
+            </a:r>
+          </a:p>
+        </p:txBody>
+      </p:sp>
+      <p:sp>
+        <p:nvSpPr>
+          <p:cNvPr id="28" name="TextBox 27"/>
+          <p:cNvSpPr txBox="1"/>
+          <p:nvPr/>
+        </p:nvSpPr>
+        <p:spPr>
+          <a:xfrm>
+            <a:off x="566928" y="4919472"/>
+            <a:ext cx="5394960" cy="274320"/>
+          </a:xfrm>
+          <a:prstGeom prst="rect">
+            <a:avLst/>
+          </a:prstGeom>
+          <a:noFill/>
+        </p:spPr>
+        <p:txBody>
+          <a:bodyPr wrap="square" lIns="0" rIns="0" tIns="0" bIns="0">
+            <a:spAutoFit/>
+          </a:bodyPr>
+          <a:lstStyle/>
+          <a:p>
+            <a:pPr algn="l">
+              <a:spcAft>
+                <a:spcPts val="0"/>
+              </a:spcAft>
+            </a:pPr>
+            <a:r>
+              <a:rPr sz="1000" b="1" i="0">
+                <a:solidFill>
+                  <a:srgbClr val="667085"/>
+                </a:solidFill>
+                <a:latin typeface="Calibri"/>
+              </a:rPr>
+              <a:t>HOW A HOOK SCRIPT TASK USES BOTH</a:t>
+            </a:r>
+          </a:p>
+        </p:txBody>
+      </p:sp>
+      <p:sp>
+        <p:nvSpPr>
+          <p:cNvPr id="29" name="Rounded Rectangle 28"/>
           <p:cNvSpPr/>
           <p:nvPr/>
         </p:nvSpPr>
         <p:spPr>
           <a:xfrm>
-            <a:off x="566928" y="4443984"/>
-            <a:ext cx="5394960" cy="1060704"/>
+            <a:off x="566928" y="5193792"/>
+            <a:ext cx="5394960" cy="1051560"/>
           </a:xfrm>
           <a:prstGeom prst="roundRect">
             <a:avLst>
@@ -5165,56 +5364,68 @@
           </a:fontRef>
         </p:style>
         <p:txBody>
-          <a:bodyPr rtlCol="0" anchor="ctr" lIns="164592"/>
+          <a:bodyPr rtlCol="0" anchor="ctr" wrap="square" lIns="164592"/>
           <a:lstStyle/>
           <a:p>
             <a:pPr algn="l"/>
             <a:r>
-              <a:rPr sz="1050">
+              <a:rPr sz="1000">
                 <a:solidFill>
                   <a:srgbClr val="1A2332"/>
                 </a:solidFill>
                 <a:latin typeface="Consolas"/>
               </a:rPr>
-              <a:t>./scripts/build_kogito_app.sh &lt;app&gt;</a:t>
+              <a:t>FlowRedirect.to(kcontext,</a:t>
             </a:r>
           </a:p>
           <a:p>
             <a:pPr algn="l"/>
             <a:r>
-              <a:rPr sz="1050">
+              <a:rPr sz="1000">
                 <a:solidFill>
                   <a:srgbClr val="1A2332"/>
                 </a:solidFill>
                 <a:latin typeface="Consolas"/>
               </a:rPr>
-              <a:t>build/kogito/&lt;app&gt;/run.sh</a:t>
+              <a:t>    CugaFlo.evaluateHook(kcontext,</a:t>
             </a:r>
           </a:p>
           <a:p>
             <a:pPr algn="l"/>
             <a:r>
-              <a:rPr sz="1050">
+              <a:rPr sz="1000">
                 <a:solidFill>
                   <a:srgbClr val="1A2332"/>
                 </a:solidFill>
                 <a:latin typeface="Consolas"/>
               </a:rPr>
-              <a:t>cuga start flow_agent_inline &lt;app&gt;</a:t>
-            </a:r>
-          </a:p>
-        </p:txBody>
-      </p:sp>
-      <p:sp>
-        <p:nvSpPr>
-          <p:cNvPr id="19" name="TextBox 18"/>
+              <a:t>        "Flow_1e5ztf6", "pre credit check",</a:t>
+            </a:r>
+          </a:p>
+          <a:p>
+            <a:pPr algn="l"/>
+            <a:r>
+              <a:rPr sz="1000">
+                <a:solidFill>
+                  <a:srgbClr val="1A2332"/>
+                </a:solidFill>
+                <a:latin typeface="Consolas"/>
+              </a:rPr>
+              <a:t>        "Task_CompleteProcess"));</a:t>
+            </a:r>
+          </a:p>
+        </p:txBody>
+      </p:sp>
+      <p:sp>
+        <p:nvSpPr>
+          <p:cNvPr id="30" name="TextBox 29"/>
           <p:cNvSpPr txBox="1"/>
           <p:nvPr/>
         </p:nvSpPr>
         <p:spPr>
           <a:xfrm>
-            <a:off x="566928" y="5797296"/>
-            <a:ext cx="11064240" cy="274320"/>
+            <a:off x="6236208" y="4919472"/>
+            <a:ext cx="5394960" cy="274320"/>
           </a:xfrm>
           <a:prstGeom prst="rect">
             <a:avLst/>
@@ -5233,13 +5444,133 @@
               </a:spcAft>
             </a:pPr>
             <a:r>
-              <a:rPr sz="950" b="0" i="0">
+              <a:rPr sz="1000" b="1" i="0">
                 <a:solidFill>
                   <a:srgbClr val="667085"/>
                 </a:solidFill>
                 <a:latin typeface="Calibri"/>
               </a:rPr>
-              <a:t>Not implemented: SKIP_NODE — CONTINUE, SKIP_TO and TERMINATE all work. See README-KOGITO.md for the measured dead ends and the recommended route.</a:t>
+              <a:t>BUILD AND RUN</a:t>
+            </a:r>
+          </a:p>
+        </p:txBody>
+      </p:sp>
+      <p:sp>
+        <p:nvSpPr>
+          <p:cNvPr id="31" name="Rounded Rectangle 30"/>
+          <p:cNvSpPr/>
+          <p:nvPr/>
+        </p:nvSpPr>
+        <p:spPr>
+          <a:xfrm>
+            <a:off x="6236208" y="5193792"/>
+            <a:ext cx="5394960" cy="1051560"/>
+          </a:xfrm>
+          <a:prstGeom prst="roundRect">
+            <a:avLst>
+              <a:gd name="adj" fmla="val 6000"/>
+            </a:avLst>
+          </a:prstGeom>
+          <a:solidFill>
+            <a:srgbClr val="F5F7FA"/>
+          </a:solidFill>
+          <a:ln>
+            <a:solidFill>
+              <a:srgbClr val="D8DEE6"/>
+            </a:solidFill>
+          </a:ln>
+          <a:effectLst/>
+        </p:spPr>
+        <p:style>
+          <a:lnRef idx="1">
+            <a:schemeClr val="accent1"/>
+          </a:lnRef>
+          <a:fillRef idx="3">
+            <a:schemeClr val="accent1"/>
+          </a:fillRef>
+          <a:effectRef idx="2">
+            <a:schemeClr val="accent1"/>
+          </a:effectRef>
+          <a:fontRef idx="minor">
+            <a:schemeClr val="lt1"/>
+          </a:fontRef>
+        </p:style>
+        <p:txBody>
+          <a:bodyPr rtlCol="0" anchor="ctr" wrap="square" lIns="164592"/>
+          <a:lstStyle/>
+          <a:p>
+            <a:pPr algn="l"/>
+            <a:r>
+              <a:rPr sz="1050">
+                <a:solidFill>
+                  <a:srgbClr val="1A2332"/>
+                </a:solidFill>
+                <a:latin typeface="Consolas"/>
+              </a:rPr>
+              <a:t>./scripts/build_kogito_app.sh &lt;app&gt;</a:t>
+            </a:r>
+          </a:p>
+          <a:p>
+            <a:pPr algn="l"/>
+            <a:r>
+              <a:rPr sz="1050">
+                <a:solidFill>
+                  <a:srgbClr val="1A2332"/>
+                </a:solidFill>
+                <a:latin typeface="Consolas"/>
+              </a:rPr>
+              <a:t>build/kogito/&lt;app&gt;/run.sh</a:t>
+            </a:r>
+          </a:p>
+          <a:p>
+            <a:pPr algn="l"/>
+            <a:r>
+              <a:rPr sz="1050">
+                <a:solidFill>
+                  <a:srgbClr val="1A2332"/>
+                </a:solidFill>
+                <a:latin typeface="Consolas"/>
+              </a:rPr>
+              <a:t>cuga start flow_agent_inline &lt;app&gt;</a:t>
+            </a:r>
+          </a:p>
+        </p:txBody>
+      </p:sp>
+      <p:sp>
+        <p:nvSpPr>
+          <p:cNvPr id="32" name="TextBox 31"/>
+          <p:cNvSpPr txBox="1"/>
+          <p:nvPr/>
+        </p:nvSpPr>
+        <p:spPr>
+          <a:xfrm>
+            <a:off x="566928" y="6382512"/>
+            <a:ext cx="11064240" cy="274320"/>
+          </a:xfrm>
+          <a:prstGeom prst="rect">
+            <a:avLst/>
+          </a:prstGeom>
+          <a:noFill/>
+        </p:spPr>
+        <p:txBody>
+          <a:bodyPr wrap="square" lIns="0" rIns="0" tIns="0" bIns="0">
+            <a:spAutoFit/>
+          </a:bodyPr>
+          <a:lstStyle/>
+          <a:p>
+            <a:pPr algn="l">
+              <a:spcAft>
+                <a:spcPts val="0"/>
+              </a:spcAft>
+            </a:pPr>
+            <a:r>
+              <a:rPr sz="950" b="0" i="0">
+                <a:solidFill>
+                  <a:srgbClr val="667085"/>
+                </a:solidFill>
+                <a:latin typeface="Calibri"/>
+              </a:rPr>
+              <a:t>Both classes are app-independent and shared — parameterised entirely by the arguments the BPMN script tasks pass, so nothing per-app is written in Java.</a:t>
             </a:r>
           </a:p>
         </p:txBody>

--- a/docs/diagrams/cuga-flo-kogito-integration.pptx
+++ b/docs/diagrams/cuga-flo-kogito-integration.pptx
@@ -7,6 +7,8 @@
   <p:sldIdLst>
     <p:sldId id="256" r:id="rId7"/>
     <p:sldId id="257" r:id="rId8"/>
+    <p:sldId id="258" r:id="rId9"/>
+    <p:sldId id="259" r:id="rId10"/>
   </p:sldIdLst>
   <p:sldSz cx="12191695" cy="6858000" type="screen4x3"/>
   <p:notesSz cx="6858000" cy="9144000"/>
@@ -5571,6 +5573,2542 @@
                 <a:latin typeface="Calibri"/>
               </a:rPr>
               <a:t>Both classes are app-independent and shared — parameterised entirely by the arguments the BPMN script tasks pass, so nothing per-app is written in Java.</a:t>
+            </a:r>
+          </a:p>
+        </p:txBody>
+      </p:sp>
+    </p:spTree>
+  </p:cSld>
+  <p:clrMapOvr>
+    <a:masterClrMapping/>
+  </p:clrMapOvr>
+</p:sld>
+</file>
+
+<file path=ppt/slides/slide3.xml><?xml version="1.0" encoding="utf-8"?>
+<p:sld xmlns:a="http://schemas.openxmlformats.org/drawingml/2006/main" xmlns:p="http://schemas.openxmlformats.org/presentationml/2006/main" xmlns:r="http://schemas.openxmlformats.org/officeDocument/2006/relationships">
+  <p:cSld>
+    <p:spTree>
+      <p:nvGrpSpPr>
+        <p:cNvPr id="1" name=""/>
+        <p:cNvGrpSpPr/>
+        <p:nvPr/>
+      </p:nvGrpSpPr>
+      <p:grpSpPr/>
+      <p:sp>
+        <p:nvSpPr>
+          <p:cNvPr id="2" name="TextBox 1"/>
+          <p:cNvSpPr txBox="1"/>
+          <p:nvPr/>
+        </p:nvSpPr>
+        <p:spPr>
+          <a:xfrm>
+            <a:off x="566928" y="384048"/>
+            <a:ext cx="10972800" cy="274320"/>
+          </a:xfrm>
+          <a:prstGeom prst="rect">
+            <a:avLst/>
+          </a:prstGeom>
+          <a:noFill/>
+        </p:spPr>
+        <p:txBody>
+          <a:bodyPr wrap="square" lIns="0" rIns="0" tIns="0" bIns="0">
+            <a:spAutoFit/>
+          </a:bodyPr>
+          <a:lstStyle/>
+          <a:p>
+            <a:pPr algn="l">
+              <a:spcAft>
+                <a:spcPts val="0"/>
+              </a:spcAft>
+            </a:pPr>
+            <a:r>
+              <a:rPr sz="1050" b="1" i="0">
+                <a:solidFill>
+                  <a:srgbClr val="3B7DD8"/>
+                </a:solidFill>
+                <a:latin typeface="Calibri"/>
+              </a:rPr>
+              <a:t>CUGA FLO · KOGITO TOOLING</a:t>
+            </a:r>
+          </a:p>
+        </p:txBody>
+      </p:sp>
+      <p:sp>
+        <p:nvSpPr>
+          <p:cNvPr id="3" name="TextBox 2"/>
+          <p:cNvSpPr txBox="1"/>
+          <p:nvPr/>
+        </p:nvSpPr>
+        <p:spPr>
+          <a:xfrm>
+            <a:off x="566928" y="658368"/>
+            <a:ext cx="10972800" cy="548640"/>
+          </a:xfrm>
+          <a:prstGeom prst="rect">
+            <a:avLst/>
+          </a:prstGeom>
+          <a:noFill/>
+        </p:spPr>
+        <p:txBody>
+          <a:bodyPr wrap="square" lIns="0" rIns="0" tIns="0" bIns="0">
+            <a:spAutoFit/>
+          </a:bodyPr>
+          <a:lstStyle/>
+          <a:p>
+            <a:pPr algn="l">
+              <a:spcAft>
+                <a:spcPts val="0"/>
+              </a:spcAft>
+            </a:pPr>
+            <a:r>
+              <a:rPr sz="2800" b="1" i="0">
+                <a:solidFill>
+                  <a:srgbClr val="1A2332"/>
+                </a:solidFill>
+                <a:latin typeface="Calibri"/>
+              </a:rPr>
+              <a:t>One command turns an app into a service</a:t>
+            </a:r>
+          </a:p>
+        </p:txBody>
+      </p:sp>
+      <p:sp>
+        <p:nvSpPr>
+          <p:cNvPr id="4" name="Rectangle 3"/>
+          <p:cNvSpPr/>
+          <p:nvPr/>
+        </p:nvSpPr>
+        <p:spPr>
+          <a:xfrm>
+            <a:off x="566928" y="1298448"/>
+            <a:ext cx="11064240" cy="9525"/>
+          </a:xfrm>
+          <a:prstGeom prst="rect">
+            <a:avLst/>
+          </a:prstGeom>
+          <a:solidFill>
+            <a:srgbClr val="D8DEE6"/>
+          </a:solidFill>
+          <a:ln>
+            <a:noFill/>
+          </a:ln>
+          <a:effectLst/>
+        </p:spPr>
+        <p:style>
+          <a:lnRef idx="1">
+            <a:schemeClr val="accent1"/>
+          </a:lnRef>
+          <a:fillRef idx="3">
+            <a:schemeClr val="accent1"/>
+          </a:fillRef>
+          <a:effectRef idx="2">
+            <a:schemeClr val="accent1"/>
+          </a:effectRef>
+          <a:fontRef idx="minor">
+            <a:schemeClr val="lt1"/>
+          </a:fontRef>
+        </p:style>
+        <p:txBody>
+          <a:bodyPr rtlCol="0" anchor="ctr"/>
+          <a:lstStyle/>
+          <a:p>
+            <a:pPr algn="ctr"/>
+          </a:p>
+        </p:txBody>
+      </p:sp>
+      <p:sp>
+        <p:nvSpPr>
+          <p:cNvPr id="5" name="TextBox 4"/>
+          <p:cNvSpPr txBox="1"/>
+          <p:nvPr/>
+        </p:nvSpPr>
+        <p:spPr>
+          <a:xfrm>
+            <a:off x="566928" y="1481328"/>
+            <a:ext cx="11064240" cy="365760"/>
+          </a:xfrm>
+          <a:prstGeom prst="rect">
+            <a:avLst/>
+          </a:prstGeom>
+          <a:noFill/>
+        </p:spPr>
+        <p:txBody>
+          <a:bodyPr wrap="square" lIns="0" rIns="0" tIns="0" bIns="0">
+            <a:spAutoFit/>
+          </a:bodyPr>
+          <a:lstStyle/>
+          <a:p>
+            <a:pPr algn="l">
+              <a:spcAft>
+                <a:spcPts val="0"/>
+              </a:spcAft>
+            </a:pPr>
+            <a:r>
+              <a:rPr sz="1250" b="0" i="0">
+                <a:solidFill>
+                  <a:srgbClr val="667085"/>
+                </a:solidFill>
+                <a:latin typeface="Calibri"/>
+              </a:rPr>
+              <a:t>scripts/build_kogito_app.sh &lt;app-name&gt;  —  combines the app's Kogito model with the shared Java runtime and the project templates, then builds.</a:t>
+            </a:r>
+          </a:p>
+        </p:txBody>
+      </p:sp>
+      <p:sp>
+        <p:nvSpPr>
+          <p:cNvPr id="6" name="Rounded Rectangle 5"/>
+          <p:cNvSpPr/>
+          <p:nvPr/>
+        </p:nvSpPr>
+        <p:spPr>
+          <a:xfrm>
+            <a:off x="566928" y="2048256"/>
+            <a:ext cx="3429000" cy="2688336"/>
+          </a:xfrm>
+          <a:prstGeom prst="roundRect">
+            <a:avLst>
+              <a:gd name="adj" fmla="val 5000"/>
+            </a:avLst>
+          </a:prstGeom>
+          <a:solidFill>
+            <a:srgbClr val="FFFFFF"/>
+          </a:solidFill>
+          <a:ln w="15875">
+            <a:solidFill>
+              <a:srgbClr val="3B7DD8"/>
+            </a:solidFill>
+          </a:ln>
+          <a:effectLst/>
+        </p:spPr>
+        <p:style>
+          <a:lnRef idx="1">
+            <a:schemeClr val="accent1"/>
+          </a:lnRef>
+          <a:fillRef idx="3">
+            <a:schemeClr val="accent1"/>
+          </a:fillRef>
+          <a:effectRef idx="2">
+            <a:schemeClr val="accent1"/>
+          </a:effectRef>
+          <a:fontRef idx="minor">
+            <a:schemeClr val="lt1"/>
+          </a:fontRef>
+        </p:style>
+        <p:txBody>
+          <a:bodyPr rtlCol="0" anchor="ctr"/>
+          <a:lstStyle/>
+          <a:p>
+            <a:pPr algn="ctr"/>
+          </a:p>
+        </p:txBody>
+      </p:sp>
+      <p:sp>
+        <p:nvSpPr>
+          <p:cNvPr id="7" name="Rounded Rectangle 6"/>
+          <p:cNvSpPr/>
+          <p:nvPr/>
+        </p:nvSpPr>
+        <p:spPr>
+          <a:xfrm>
+            <a:off x="804672" y="2249424"/>
+            <a:ext cx="2953512" cy="310896"/>
+          </a:xfrm>
+          <a:prstGeom prst="roundRect">
+            <a:avLst/>
+          </a:prstGeom>
+          <a:solidFill>
+            <a:srgbClr val="E6F2FF"/>
+          </a:solidFill>
+          <a:ln>
+            <a:noFill/>
+          </a:ln>
+          <a:effectLst/>
+        </p:spPr>
+        <p:style>
+          <a:lnRef idx="1">
+            <a:schemeClr val="accent1"/>
+          </a:lnRef>
+          <a:fillRef idx="3">
+            <a:schemeClr val="accent1"/>
+          </a:fillRef>
+          <a:effectRef idx="2">
+            <a:schemeClr val="accent1"/>
+          </a:effectRef>
+          <a:fontRef idx="minor">
+            <a:schemeClr val="lt1"/>
+          </a:fontRef>
+        </p:style>
+        <p:txBody>
+          <a:bodyPr rtlCol="0" anchor="ctr"/>
+          <a:lstStyle/>
+          <a:p>
+            <a:pPr algn="ctr"/>
+            <a:r>
+              <a:rPr sz="1000" b="1">
+                <a:solidFill>
+                  <a:srgbClr val="3B7DD8"/>
+                </a:solidFill>
+                <a:latin typeface="Calibri"/>
+              </a:rPr>
+              <a:t>INPUT — authored in the repo</a:t>
+            </a:r>
+          </a:p>
+        </p:txBody>
+      </p:sp>
+      <p:sp>
+        <p:nvSpPr>
+          <p:cNvPr id="8" name="TextBox 7"/>
+          <p:cNvSpPr txBox="1"/>
+          <p:nvPr/>
+        </p:nvSpPr>
+        <p:spPr>
+          <a:xfrm>
+            <a:off x="841247" y="2706624"/>
+            <a:ext cx="2926080" cy="1865376"/>
+          </a:xfrm>
+          <a:prstGeom prst="rect">
+            <a:avLst/>
+          </a:prstGeom>
+          <a:noFill/>
+        </p:spPr>
+        <p:txBody>
+          <a:bodyPr wrap="square" lIns="0" rIns="0" tIns="0" bIns="0">
+            <a:spAutoFit/>
+          </a:bodyPr>
+          <a:lstStyle/>
+          <a:p>
+            <a:pPr algn="l">
+              <a:spcAft>
+                <a:spcPts val="250"/>
+              </a:spcAft>
+            </a:pPr>
+            <a:r>
+              <a:rPr sz="950" b="0" i="0">
+                <a:solidFill>
+                  <a:srgbClr val="1A2332"/>
+                </a:solidFill>
+                <a:latin typeface="Consolas"/>
+              </a:rPr>
+              <a:t>docs/examples/…/&lt;app&gt;/</a:t>
+            </a:r>
+          </a:p>
+          <a:p>
+            <a:pPr algn="l">
+              <a:spcAft>
+                <a:spcPts val="250"/>
+              </a:spcAft>
+            </a:pPr>
+            <a:r>
+              <a:rPr sz="950" b="0" i="0">
+                <a:solidFill>
+                  <a:srgbClr val="1A2332"/>
+                </a:solidFill>
+                <a:latin typeface="Consolas"/>
+              </a:rPr>
+              <a:t>  config/</a:t>
+            </a:r>
+          </a:p>
+          <a:p>
+            <a:pPr algn="l">
+              <a:spcAft>
+                <a:spcPts val="250"/>
+              </a:spcAft>
+            </a:pPr>
+            <a:r>
+              <a:rPr sz="950" b="0" i="0">
+                <a:solidFill>
+                  <a:srgbClr val="1A2332"/>
+                </a:solidFill>
+                <a:latin typeface="Consolas"/>
+              </a:rPr>
+              <a:t>    &lt;app&gt;_config.yaml</a:t>
+            </a:r>
+          </a:p>
+          <a:p>
+            <a:pPr algn="l">
+              <a:spcAft>
+                <a:spcPts val="250"/>
+              </a:spcAft>
+            </a:pPr>
+            <a:r>
+              <a:rPr sz="950" b="0" i="0">
+                <a:solidFill>
+                  <a:srgbClr val="1A2332"/>
+                </a:solidFill>
+                <a:latin typeface="Consolas"/>
+              </a:rPr>
+              <a:t>    BPMNdiagram.bpmn</a:t>
+            </a:r>
+          </a:p>
+          <a:p>
+            <a:pPr algn="l">
+              <a:spcAft>
+                <a:spcPts val="250"/>
+              </a:spcAft>
+            </a:pPr>
+            <a:r>
+              <a:rPr sz="950" b="0" i="0">
+                <a:solidFill>
+                  <a:srgbClr val="1A2332"/>
+                </a:solidFill>
+                <a:latin typeface="Consolas"/>
+              </a:rPr>
+              <a:t>    *-kogito.bpmn</a:t>
+            </a:r>
+          </a:p>
+          <a:p>
+            <a:pPr algn="l">
+              <a:spcAft>
+                <a:spcPts val="250"/>
+              </a:spcAft>
+            </a:pPr>
+            <a:r>
+              <a:rPr sz="950" b="0" i="0">
+                <a:solidFill>
+                  <a:srgbClr val="1A2332"/>
+                </a:solidFill>
+                <a:latin typeface="Consolas"/>
+              </a:rPr>
+              <a:t>  policies/</a:t>
+            </a:r>
+          </a:p>
+          <a:p>
+            <a:pPr algn="l">
+              <a:spcAft>
+                <a:spcPts val="250"/>
+              </a:spcAft>
+            </a:pPr>
+            <a:r>
+              <a:rPr sz="950" b="0" i="0">
+                <a:solidFill>
+                  <a:srgbClr val="1A2332"/>
+                </a:solidFill>
+                <a:latin typeface="Consolas"/>
+              </a:rPr>
+              <a:t>    task-*.md  hook-*.md</a:t>
+            </a:r>
+          </a:p>
+        </p:txBody>
+      </p:sp>
+      <p:sp>
+        <p:nvSpPr>
+          <p:cNvPr id="9" name="Right Arrow 8"/>
+          <p:cNvSpPr/>
+          <p:nvPr/>
+        </p:nvSpPr>
+        <p:spPr>
+          <a:xfrm>
+            <a:off x="4224528" y="3127248"/>
+            <a:ext cx="658368" cy="237744"/>
+          </a:xfrm>
+          <a:prstGeom prst="rightArrow">
+            <a:avLst/>
+          </a:prstGeom>
+          <a:solidFill>
+            <a:srgbClr val="667085"/>
+          </a:solidFill>
+          <a:ln>
+            <a:noFill/>
+          </a:ln>
+          <a:effectLst/>
+        </p:spPr>
+        <p:style>
+          <a:lnRef idx="1">
+            <a:schemeClr val="accent1"/>
+          </a:lnRef>
+          <a:fillRef idx="3">
+            <a:schemeClr val="accent1"/>
+          </a:fillRef>
+          <a:effectRef idx="2">
+            <a:schemeClr val="accent1"/>
+          </a:effectRef>
+          <a:fontRef idx="minor">
+            <a:schemeClr val="lt1"/>
+          </a:fontRef>
+        </p:style>
+        <p:txBody>
+          <a:bodyPr rtlCol="0" anchor="ctr"/>
+          <a:lstStyle/>
+          <a:p>
+            <a:pPr algn="ctr"/>
+          </a:p>
+        </p:txBody>
+      </p:sp>
+      <p:sp>
+        <p:nvSpPr>
+          <p:cNvPr id="10" name="TextBox 9"/>
+          <p:cNvSpPr txBox="1"/>
+          <p:nvPr/>
+        </p:nvSpPr>
+        <p:spPr>
+          <a:xfrm>
+            <a:off x="3904488" y="2798064"/>
+            <a:ext cx="1298448" cy="274320"/>
+          </a:xfrm>
+          <a:prstGeom prst="rect">
+            <a:avLst/>
+          </a:prstGeom>
+          <a:noFill/>
+        </p:spPr>
+        <p:txBody>
+          <a:bodyPr wrap="square" lIns="0" rIns="0" tIns="0" bIns="0">
+            <a:spAutoFit/>
+          </a:bodyPr>
+          <a:lstStyle/>
+          <a:p>
+            <a:pPr algn="ctr">
+              <a:spcAft>
+                <a:spcPts val="0"/>
+              </a:spcAft>
+            </a:pPr>
+            <a:r>
+              <a:rPr sz="850" b="0" i="0">
+                <a:solidFill>
+                  <a:srgbClr val="667085"/>
+                </a:solidFill>
+                <a:latin typeface="Calibri"/>
+              </a:rPr>
+              <a:t>build</a:t>
+            </a:r>
+          </a:p>
+        </p:txBody>
+      </p:sp>
+      <p:sp>
+        <p:nvSpPr>
+          <p:cNvPr id="11" name="Rounded Rectangle 10"/>
+          <p:cNvSpPr/>
+          <p:nvPr/>
+        </p:nvSpPr>
+        <p:spPr>
+          <a:xfrm>
+            <a:off x="5138928" y="2048256"/>
+            <a:ext cx="3291840" cy="2688336"/>
+          </a:xfrm>
+          <a:prstGeom prst="roundRect">
+            <a:avLst>
+              <a:gd name="adj" fmla="val 5000"/>
+            </a:avLst>
+          </a:prstGeom>
+          <a:solidFill>
+            <a:srgbClr val="FFFFFF"/>
+          </a:solidFill>
+          <a:ln w="15875">
+            <a:solidFill>
+              <a:srgbClr val="3BA55D"/>
+            </a:solidFill>
+          </a:ln>
+          <a:effectLst/>
+        </p:spPr>
+        <p:style>
+          <a:lnRef idx="1">
+            <a:schemeClr val="accent1"/>
+          </a:lnRef>
+          <a:fillRef idx="3">
+            <a:schemeClr val="accent1"/>
+          </a:fillRef>
+          <a:effectRef idx="2">
+            <a:schemeClr val="accent1"/>
+          </a:effectRef>
+          <a:fontRef idx="minor">
+            <a:schemeClr val="lt1"/>
+          </a:fontRef>
+        </p:style>
+        <p:txBody>
+          <a:bodyPr rtlCol="0" anchor="ctr"/>
+          <a:lstStyle/>
+          <a:p>
+            <a:pPr algn="ctr"/>
+          </a:p>
+        </p:txBody>
+      </p:sp>
+      <p:sp>
+        <p:nvSpPr>
+          <p:cNvPr id="12" name="Rounded Rectangle 11"/>
+          <p:cNvSpPr/>
+          <p:nvPr/>
+        </p:nvSpPr>
+        <p:spPr>
+          <a:xfrm>
+            <a:off x="5376672" y="2249424"/>
+            <a:ext cx="2816352" cy="310896"/>
+          </a:xfrm>
+          <a:prstGeom prst="roundRect">
+            <a:avLst/>
+          </a:prstGeom>
+          <a:solidFill>
+            <a:srgbClr val="E9F7EC"/>
+          </a:solidFill>
+          <a:ln>
+            <a:noFill/>
+          </a:ln>
+          <a:effectLst/>
+        </p:spPr>
+        <p:style>
+          <a:lnRef idx="1">
+            <a:schemeClr val="accent1"/>
+          </a:lnRef>
+          <a:fillRef idx="3">
+            <a:schemeClr val="accent1"/>
+          </a:fillRef>
+          <a:effectRef idx="2">
+            <a:schemeClr val="accent1"/>
+          </a:effectRef>
+          <a:fontRef idx="minor">
+            <a:schemeClr val="lt1"/>
+          </a:fontRef>
+        </p:style>
+        <p:txBody>
+          <a:bodyPr rtlCol="0" anchor="ctr"/>
+          <a:lstStyle/>
+          <a:p>
+            <a:pPr algn="ctr"/>
+            <a:r>
+              <a:rPr sz="1000" b="1">
+                <a:solidFill>
+                  <a:srgbClr val="3BA55D"/>
+                </a:solidFill>
+                <a:latin typeface="Calibri"/>
+              </a:rPr>
+              <a:t>OUTPUT — build/kogito/&lt;app&gt;/</a:t>
+            </a:r>
+          </a:p>
+        </p:txBody>
+      </p:sp>
+      <p:sp>
+        <p:nvSpPr>
+          <p:cNvPr id="13" name="TextBox 12"/>
+          <p:cNvSpPr txBox="1"/>
+          <p:nvPr/>
+        </p:nvSpPr>
+        <p:spPr>
+          <a:xfrm>
+            <a:off x="5413248" y="2706624"/>
+            <a:ext cx="2788920" cy="1865376"/>
+          </a:xfrm>
+          <a:prstGeom prst="rect">
+            <a:avLst/>
+          </a:prstGeom>
+          <a:noFill/>
+        </p:spPr>
+        <p:txBody>
+          <a:bodyPr wrap="square" lIns="0" rIns="0" tIns="0" bIns="0">
+            <a:spAutoFit/>
+          </a:bodyPr>
+          <a:lstStyle/>
+          <a:p>
+            <a:pPr algn="l">
+              <a:spcAft>
+                <a:spcPts val="250"/>
+              </a:spcAft>
+            </a:pPr>
+            <a:r>
+              <a:rPr sz="950" b="0" i="0">
+                <a:solidFill>
+                  <a:srgbClr val="1A2332"/>
+                </a:solidFill>
+                <a:latin typeface="Consolas"/>
+              </a:rPr>
+              <a:t>pom.xml            templated</a:t>
+            </a:r>
+          </a:p>
+          <a:p>
+            <a:pPr algn="l">
+              <a:spcAft>
+                <a:spcPts val="250"/>
+              </a:spcAft>
+            </a:pPr>
+            <a:r>
+              <a:rPr sz="950" b="0" i="0">
+                <a:solidFill>
+                  <a:srgbClr val="1A2332"/>
+                </a:solidFill>
+                <a:latin typeface="Consolas"/>
+              </a:rPr>
+              <a:t>run.sh             generated</a:t>
+            </a:r>
+          </a:p>
+          <a:p>
+            <a:pPr algn="l">
+              <a:spcAft>
+                <a:spcPts val="250"/>
+              </a:spcAft>
+            </a:pPr>
+            <a:r>
+              <a:rPr sz="950" b="0" i="0">
+                <a:solidFill>
+                  <a:srgbClr val="1A2332"/>
+                </a:solidFill>
+                <a:latin typeface="Consolas"/>
+              </a:rPr>
+              <a:t>build.log</a:t>
+            </a:r>
+          </a:p>
+          <a:p>
+            <a:pPr algn="l">
+              <a:spcAft>
+                <a:spcPts val="250"/>
+              </a:spcAft>
+            </a:pPr>
+            <a:r>
+              <a:rPr sz="950" b="0" i="0">
+                <a:solidFill>
+                  <a:srgbClr val="1A2332"/>
+                </a:solidFill>
+                <a:latin typeface="Consolas"/>
+              </a:rPr>
+              <a:t>src/main/java/org/cuga/</a:t>
+            </a:r>
+          </a:p>
+          <a:p>
+            <a:pPr algn="l">
+              <a:spcAft>
+                <a:spcPts val="250"/>
+              </a:spcAft>
+            </a:pPr>
+            <a:r>
+              <a:rPr sz="950" b="0" i="0">
+                <a:solidFill>
+                  <a:srgbClr val="1A2332"/>
+                </a:solidFill>
+                <a:latin typeface="Consolas"/>
+              </a:rPr>
+              <a:t>  CugaFlo.java     copied</a:t>
+            </a:r>
+          </a:p>
+          <a:p>
+            <a:pPr algn="l">
+              <a:spcAft>
+                <a:spcPts val="250"/>
+              </a:spcAft>
+            </a:pPr>
+            <a:r>
+              <a:rPr sz="950" b="0" i="0">
+                <a:solidFill>
+                  <a:srgbClr val="1A2332"/>
+                </a:solidFill>
+                <a:latin typeface="Consolas"/>
+              </a:rPr>
+              <a:t>  FlowRedirect.java  copied</a:t>
+            </a:r>
+          </a:p>
+          <a:p>
+            <a:pPr algn="l">
+              <a:spcAft>
+                <a:spcPts val="250"/>
+              </a:spcAft>
+            </a:pPr>
+            <a:r>
+              <a:rPr sz="950" b="0" i="0">
+                <a:solidFill>
+                  <a:srgbClr val="1A2332"/>
+                </a:solidFill>
+                <a:latin typeface="Consolas"/>
+              </a:rPr>
+              <a:t>src/main/resources/</a:t>
+            </a:r>
+          </a:p>
+          <a:p>
+            <a:pPr algn="l">
+              <a:spcAft>
+                <a:spcPts val="250"/>
+              </a:spcAft>
+            </a:pPr>
+            <a:r>
+              <a:rPr sz="950" b="0" i="0">
+                <a:solidFill>
+                  <a:srgbClr val="1A2332"/>
+                </a:solidFill>
+                <a:latin typeface="Consolas"/>
+              </a:rPr>
+              <a:t>  application.properties</a:t>
+            </a:r>
+          </a:p>
+          <a:p>
+            <a:pPr algn="l">
+              <a:spcAft>
+                <a:spcPts val="250"/>
+              </a:spcAft>
+            </a:pPr>
+            <a:r>
+              <a:rPr sz="950" b="0" i="0">
+                <a:solidFill>
+                  <a:srgbClr val="1A2332"/>
+                </a:solidFill>
+                <a:latin typeface="Consolas"/>
+              </a:rPr>
+              <a:t>  org/cuga/*-kogito.bpmn</a:t>
+            </a:r>
+          </a:p>
+          <a:p>
+            <a:pPr algn="l">
+              <a:spcAft>
+                <a:spcPts val="250"/>
+              </a:spcAft>
+            </a:pPr>
+            <a:r>
+              <a:rPr sz="950" b="0" i="0">
+                <a:solidFill>
+                  <a:srgbClr val="1A2332"/>
+                </a:solidFill>
+                <a:latin typeface="Consolas"/>
+              </a:rPr>
+              <a:t>target/quarkus-app/…jar</a:t>
+            </a:r>
+          </a:p>
+        </p:txBody>
+      </p:sp>
+      <p:sp>
+        <p:nvSpPr>
+          <p:cNvPr id="14" name="Rounded Rectangle 13"/>
+          <p:cNvSpPr/>
+          <p:nvPr/>
+        </p:nvSpPr>
+        <p:spPr>
+          <a:xfrm>
+            <a:off x="8641080" y="2048256"/>
+            <a:ext cx="2990088" cy="2688336"/>
+          </a:xfrm>
+          <a:prstGeom prst="roundRect">
+            <a:avLst>
+              <a:gd name="adj" fmla="val 5000"/>
+            </a:avLst>
+          </a:prstGeom>
+          <a:solidFill>
+            <a:srgbClr val="FFFFFF"/>
+          </a:solidFill>
+          <a:ln w="15875">
+            <a:solidFill>
+              <a:srgbClr val="D8DEE6"/>
+            </a:solidFill>
+          </a:ln>
+          <a:effectLst/>
+        </p:spPr>
+        <p:style>
+          <a:lnRef idx="1">
+            <a:schemeClr val="accent1"/>
+          </a:lnRef>
+          <a:fillRef idx="3">
+            <a:schemeClr val="accent1"/>
+          </a:fillRef>
+          <a:effectRef idx="2">
+            <a:schemeClr val="accent1"/>
+          </a:effectRef>
+          <a:fontRef idx="minor">
+            <a:schemeClr val="lt1"/>
+          </a:fontRef>
+        </p:style>
+        <p:txBody>
+          <a:bodyPr rtlCol="0" anchor="ctr"/>
+          <a:lstStyle/>
+          <a:p>
+            <a:pPr algn="ctr"/>
+          </a:p>
+        </p:txBody>
+      </p:sp>
+      <p:sp>
+        <p:nvSpPr>
+          <p:cNvPr id="15" name="TextBox 14"/>
+          <p:cNvSpPr txBox="1"/>
+          <p:nvPr/>
+        </p:nvSpPr>
+        <p:spPr>
+          <a:xfrm>
+            <a:off x="8887968" y="2231136"/>
+            <a:ext cx="2560320" cy="274320"/>
+          </a:xfrm>
+          <a:prstGeom prst="rect">
+            <a:avLst/>
+          </a:prstGeom>
+          <a:noFill/>
+        </p:spPr>
+        <p:txBody>
+          <a:bodyPr wrap="square" lIns="0" rIns="0" tIns="0" bIns="0">
+            <a:spAutoFit/>
+          </a:bodyPr>
+          <a:lstStyle/>
+          <a:p>
+            <a:pPr algn="l">
+              <a:spcAft>
+                <a:spcPts val="0"/>
+              </a:spcAft>
+            </a:pPr>
+            <a:r>
+              <a:rPr sz="1000" b="1" i="0">
+                <a:solidFill>
+                  <a:srgbClr val="667085"/>
+                </a:solidFill>
+                <a:latin typeface="Calibri"/>
+              </a:rPr>
+              <a:t>WHAT IT DOES</a:t>
+            </a:r>
+          </a:p>
+        </p:txBody>
+      </p:sp>
+      <p:sp>
+        <p:nvSpPr>
+          <p:cNvPr id="16" name="TextBox 15"/>
+          <p:cNvSpPr txBox="1"/>
+          <p:nvPr/>
+        </p:nvSpPr>
+        <p:spPr>
+          <a:xfrm>
+            <a:off x="8887968" y="2578608"/>
+            <a:ext cx="274320" cy="219456"/>
+          </a:xfrm>
+          <a:prstGeom prst="rect">
+            <a:avLst/>
+          </a:prstGeom>
+          <a:noFill/>
+        </p:spPr>
+        <p:txBody>
+          <a:bodyPr wrap="square" lIns="0" rIns="0" tIns="0" bIns="0">
+            <a:spAutoFit/>
+          </a:bodyPr>
+          <a:lstStyle/>
+          <a:p>
+            <a:pPr algn="l">
+              <a:spcAft>
+                <a:spcPts val="0"/>
+              </a:spcAft>
+            </a:pPr>
+            <a:r>
+              <a:rPr sz="900" b="1" i="0">
+                <a:solidFill>
+                  <a:srgbClr val="3B7DD8"/>
+                </a:solidFill>
+                <a:latin typeface="Calibri"/>
+              </a:rPr>
+              <a:t>1.</a:t>
+            </a:r>
+          </a:p>
+        </p:txBody>
+      </p:sp>
+      <p:sp>
+        <p:nvSpPr>
+          <p:cNvPr id="17" name="TextBox 16"/>
+          <p:cNvSpPr txBox="1"/>
+          <p:nvPr/>
+        </p:nvSpPr>
+        <p:spPr>
+          <a:xfrm>
+            <a:off x="9162288" y="2578608"/>
+            <a:ext cx="2286000" cy="365760"/>
+          </a:xfrm>
+          <a:prstGeom prst="rect">
+            <a:avLst/>
+          </a:prstGeom>
+          <a:noFill/>
+        </p:spPr>
+        <p:txBody>
+          <a:bodyPr wrap="square" lIns="0" rIns="0" tIns="0" bIns="0">
+            <a:spAutoFit/>
+          </a:bodyPr>
+          <a:lstStyle/>
+          <a:p>
+            <a:pPr algn="l">
+              <a:spcAft>
+                <a:spcPts val="0"/>
+              </a:spcAft>
+            </a:pPr>
+            <a:r>
+              <a:rPr sz="900" b="0" i="0">
+                <a:solidFill>
+                  <a:srgbClr val="1A2332"/>
+                </a:solidFill>
+                <a:latin typeface="Calibri"/>
+              </a:rPr>
+              <a:t>Finds *-kogito.bpmn, or fails</a:t>
+            </a:r>
+          </a:p>
+        </p:txBody>
+      </p:sp>
+      <p:sp>
+        <p:nvSpPr>
+          <p:cNvPr id="18" name="TextBox 17"/>
+          <p:cNvSpPr txBox="1"/>
+          <p:nvPr/>
+        </p:nvSpPr>
+        <p:spPr>
+          <a:xfrm>
+            <a:off x="8887968" y="2834639"/>
+            <a:ext cx="274320" cy="219456"/>
+          </a:xfrm>
+          <a:prstGeom prst="rect">
+            <a:avLst/>
+          </a:prstGeom>
+          <a:noFill/>
+        </p:spPr>
+        <p:txBody>
+          <a:bodyPr wrap="square" lIns="0" rIns="0" tIns="0" bIns="0">
+            <a:spAutoFit/>
+          </a:bodyPr>
+          <a:lstStyle/>
+          <a:p>
+            <a:pPr algn="l">
+              <a:spcAft>
+                <a:spcPts val="0"/>
+              </a:spcAft>
+            </a:pPr>
+            <a:r>
+              <a:rPr sz="900" b="1" i="0">
+                <a:solidFill>
+                  <a:srgbClr val="3B7DD8"/>
+                </a:solidFill>
+                <a:latin typeface="Calibri"/>
+              </a:rPr>
+              <a:t>2.</a:t>
+            </a:r>
+          </a:p>
+        </p:txBody>
+      </p:sp>
+      <p:sp>
+        <p:nvSpPr>
+          <p:cNvPr id="19" name="TextBox 18"/>
+          <p:cNvSpPr txBox="1"/>
+          <p:nvPr/>
+        </p:nvSpPr>
+        <p:spPr>
+          <a:xfrm>
+            <a:off x="9162288" y="2834639"/>
+            <a:ext cx="2286000" cy="365760"/>
+          </a:xfrm>
+          <a:prstGeom prst="rect">
+            <a:avLst/>
+          </a:prstGeom>
+          <a:noFill/>
+        </p:spPr>
+        <p:txBody>
+          <a:bodyPr wrap="square" lIns="0" rIns="0" tIns="0" bIns="0">
+            <a:spAutoFit/>
+          </a:bodyPr>
+          <a:lstStyle/>
+          <a:p>
+            <a:pPr algn="l">
+              <a:spcAft>
+                <a:spcPts val="0"/>
+              </a:spcAft>
+            </a:pPr>
+            <a:r>
+              <a:rPr sz="900" b="0" i="0">
+                <a:solidFill>
+                  <a:srgbClr val="1A2332"/>
+                </a:solidFill>
+                <a:latin typeface="Calibri"/>
+              </a:rPr>
+              <a:t>Warns if a YAML variable has no</a:t>
+            </a:r>
+          </a:p>
+          <a:p>
+            <a:pPr algn="l">
+              <a:spcAft>
+                <a:spcPts val="0"/>
+              </a:spcAft>
+            </a:pPr>
+            <a:r>
+              <a:rPr sz="900" b="0" i="0">
+                <a:solidFill>
+                  <a:srgbClr val="1A2332"/>
+                </a:solidFill>
+                <a:latin typeface="Calibri"/>
+              </a:rPr>
+              <a:t>&lt;bpmn2:property&gt; in the model</a:t>
+            </a:r>
+          </a:p>
+        </p:txBody>
+      </p:sp>
+      <p:sp>
+        <p:nvSpPr>
+          <p:cNvPr id="20" name="TextBox 19"/>
+          <p:cNvSpPr txBox="1"/>
+          <p:nvPr/>
+        </p:nvSpPr>
+        <p:spPr>
+          <a:xfrm>
+            <a:off x="8887968" y="3236975"/>
+            <a:ext cx="274320" cy="219456"/>
+          </a:xfrm>
+          <a:prstGeom prst="rect">
+            <a:avLst/>
+          </a:prstGeom>
+          <a:noFill/>
+        </p:spPr>
+        <p:txBody>
+          <a:bodyPr wrap="square" lIns="0" rIns="0" tIns="0" bIns="0">
+            <a:spAutoFit/>
+          </a:bodyPr>
+          <a:lstStyle/>
+          <a:p>
+            <a:pPr algn="l">
+              <a:spcAft>
+                <a:spcPts val="0"/>
+              </a:spcAft>
+            </a:pPr>
+            <a:r>
+              <a:rPr sz="900" b="1" i="0">
+                <a:solidFill>
+                  <a:srgbClr val="3B7DD8"/>
+                </a:solidFill>
+                <a:latin typeface="Calibri"/>
+              </a:rPr>
+              <a:t>3.</a:t>
+            </a:r>
+          </a:p>
+        </p:txBody>
+      </p:sp>
+      <p:sp>
+        <p:nvSpPr>
+          <p:cNvPr id="21" name="TextBox 20"/>
+          <p:cNvSpPr txBox="1"/>
+          <p:nvPr/>
+        </p:nvSpPr>
+        <p:spPr>
+          <a:xfrm>
+            <a:off x="9162288" y="3236975"/>
+            <a:ext cx="2286000" cy="365760"/>
+          </a:xfrm>
+          <a:prstGeom prst="rect">
+            <a:avLst/>
+          </a:prstGeom>
+          <a:noFill/>
+        </p:spPr>
+        <p:txBody>
+          <a:bodyPr wrap="square" lIns="0" rIns="0" tIns="0" bIns="0">
+            <a:spAutoFit/>
+          </a:bodyPr>
+          <a:lstStyle/>
+          <a:p>
+            <a:pPr algn="l">
+              <a:spcAft>
+                <a:spcPts val="0"/>
+              </a:spcAft>
+            </a:pPr>
+            <a:r>
+              <a:rPr sz="900" b="0" i="0">
+                <a:solidFill>
+                  <a:srgbClr val="1A2332"/>
+                </a:solidFill>
+                <a:latin typeface="Calibri"/>
+              </a:rPr>
+              <a:t>Resolves the port: --port, else</a:t>
+            </a:r>
+          </a:p>
+          <a:p>
+            <a:pPr algn="l">
+              <a:spcAft>
+                <a:spcPts val="0"/>
+              </a:spcAft>
+            </a:pPr>
+            <a:r>
+              <a:rPr sz="900" b="0" i="0">
+                <a:solidFill>
+                  <a:srgbClr val="1A2332"/>
+                </a:solidFill>
+                <a:latin typeface="Calibri"/>
+              </a:rPr>
+              <a:t>workflow_engine.url, else 8081</a:t>
+            </a:r>
+          </a:p>
+        </p:txBody>
+      </p:sp>
+      <p:sp>
+        <p:nvSpPr>
+          <p:cNvPr id="22" name="TextBox 21"/>
+          <p:cNvSpPr txBox="1"/>
+          <p:nvPr/>
+        </p:nvSpPr>
+        <p:spPr>
+          <a:xfrm>
+            <a:off x="8887968" y="3639311"/>
+            <a:ext cx="274320" cy="219456"/>
+          </a:xfrm>
+          <a:prstGeom prst="rect">
+            <a:avLst/>
+          </a:prstGeom>
+          <a:noFill/>
+        </p:spPr>
+        <p:txBody>
+          <a:bodyPr wrap="square" lIns="0" rIns="0" tIns="0" bIns="0">
+            <a:spAutoFit/>
+          </a:bodyPr>
+          <a:lstStyle/>
+          <a:p>
+            <a:pPr algn="l">
+              <a:spcAft>
+                <a:spcPts val="0"/>
+              </a:spcAft>
+            </a:pPr>
+            <a:r>
+              <a:rPr sz="900" b="1" i="0">
+                <a:solidFill>
+                  <a:srgbClr val="3B7DD8"/>
+                </a:solidFill>
+                <a:latin typeface="Calibri"/>
+              </a:rPr>
+              <a:t>4.</a:t>
+            </a:r>
+          </a:p>
+        </p:txBody>
+      </p:sp>
+      <p:sp>
+        <p:nvSpPr>
+          <p:cNvPr id="23" name="TextBox 22"/>
+          <p:cNvSpPr txBox="1"/>
+          <p:nvPr/>
+        </p:nvSpPr>
+        <p:spPr>
+          <a:xfrm>
+            <a:off x="9162288" y="3639311"/>
+            <a:ext cx="2286000" cy="365760"/>
+          </a:xfrm>
+          <a:prstGeom prst="rect">
+            <a:avLst/>
+          </a:prstGeom>
+          <a:noFill/>
+        </p:spPr>
+        <p:txBody>
+          <a:bodyPr wrap="square" lIns="0" rIns="0" tIns="0" bIns="0">
+            <a:spAutoFit/>
+          </a:bodyPr>
+          <a:lstStyle/>
+          <a:p>
+            <a:pPr algn="l">
+              <a:spcAft>
+                <a:spcPts val="0"/>
+              </a:spcAft>
+            </a:pPr>
+            <a:r>
+              <a:rPr sz="900" b="0" i="0">
+                <a:solidFill>
+                  <a:srgbClr val="1A2332"/>
+                </a:solidFill>
+                <a:latin typeface="Calibri"/>
+              </a:rPr>
+              <a:t>Probes for a JDK 17+</a:t>
+            </a:r>
+          </a:p>
+        </p:txBody>
+      </p:sp>
+      <p:sp>
+        <p:nvSpPr>
+          <p:cNvPr id="24" name="TextBox 23"/>
+          <p:cNvSpPr txBox="1"/>
+          <p:nvPr/>
+        </p:nvSpPr>
+        <p:spPr>
+          <a:xfrm>
+            <a:off x="8887968" y="3895344"/>
+            <a:ext cx="274320" cy="219456"/>
+          </a:xfrm>
+          <a:prstGeom prst="rect">
+            <a:avLst/>
+          </a:prstGeom>
+          <a:noFill/>
+        </p:spPr>
+        <p:txBody>
+          <a:bodyPr wrap="square" lIns="0" rIns="0" tIns="0" bIns="0">
+            <a:spAutoFit/>
+          </a:bodyPr>
+          <a:lstStyle/>
+          <a:p>
+            <a:pPr algn="l">
+              <a:spcAft>
+                <a:spcPts val="0"/>
+              </a:spcAft>
+            </a:pPr>
+            <a:r>
+              <a:rPr sz="900" b="1" i="0">
+                <a:solidFill>
+                  <a:srgbClr val="3B7DD8"/>
+                </a:solidFill>
+                <a:latin typeface="Calibri"/>
+              </a:rPr>
+              <a:t>5.</a:t>
+            </a:r>
+          </a:p>
+        </p:txBody>
+      </p:sp>
+      <p:sp>
+        <p:nvSpPr>
+          <p:cNvPr id="25" name="TextBox 24"/>
+          <p:cNvSpPr txBox="1"/>
+          <p:nvPr/>
+        </p:nvSpPr>
+        <p:spPr>
+          <a:xfrm>
+            <a:off x="9162288" y="3895344"/>
+            <a:ext cx="2286000" cy="365760"/>
+          </a:xfrm>
+          <a:prstGeom prst="rect">
+            <a:avLst/>
+          </a:prstGeom>
+          <a:noFill/>
+        </p:spPr>
+        <p:txBody>
+          <a:bodyPr wrap="square" lIns="0" rIns="0" tIns="0" bIns="0">
+            <a:spAutoFit/>
+          </a:bodyPr>
+          <a:lstStyle/>
+          <a:p>
+            <a:pPr algn="l">
+              <a:spcAft>
+                <a:spcPts val="0"/>
+              </a:spcAft>
+            </a:pPr>
+            <a:r>
+              <a:rPr sz="900" b="0" i="0">
+                <a:solidFill>
+                  <a:srgbClr val="1A2332"/>
+                </a:solidFill>
+                <a:latin typeface="Calibri"/>
+              </a:rPr>
+              <a:t>Scaffolds pom + properties from</a:t>
+            </a:r>
+          </a:p>
+          <a:p>
+            <a:pPr algn="l">
+              <a:spcAft>
+                <a:spcPts val="0"/>
+              </a:spcAft>
+            </a:pPr>
+            <a:r>
+              <a:rPr sz="900" b="0" i="0">
+                <a:solidFill>
+                  <a:srgbClr val="1A2332"/>
+                </a:solidFill>
+                <a:latin typeface="Calibri"/>
+              </a:rPr>
+              <a:t>templates; copies runtime and model</a:t>
+            </a:r>
+          </a:p>
+        </p:txBody>
+      </p:sp>
+      <p:sp>
+        <p:nvSpPr>
+          <p:cNvPr id="26" name="TextBox 25"/>
+          <p:cNvSpPr txBox="1"/>
+          <p:nvPr/>
+        </p:nvSpPr>
+        <p:spPr>
+          <a:xfrm>
+            <a:off x="8887968" y="4297680"/>
+            <a:ext cx="274320" cy="219456"/>
+          </a:xfrm>
+          <a:prstGeom prst="rect">
+            <a:avLst/>
+          </a:prstGeom>
+          <a:noFill/>
+        </p:spPr>
+        <p:txBody>
+          <a:bodyPr wrap="square" lIns="0" rIns="0" tIns="0" bIns="0">
+            <a:spAutoFit/>
+          </a:bodyPr>
+          <a:lstStyle/>
+          <a:p>
+            <a:pPr algn="l">
+              <a:spcAft>
+                <a:spcPts val="0"/>
+              </a:spcAft>
+            </a:pPr>
+            <a:r>
+              <a:rPr sz="900" b="1" i="0">
+                <a:solidFill>
+                  <a:srgbClr val="3B7DD8"/>
+                </a:solidFill>
+                <a:latin typeface="Calibri"/>
+              </a:rPr>
+              <a:t>6.</a:t>
+            </a:r>
+          </a:p>
+        </p:txBody>
+      </p:sp>
+      <p:sp>
+        <p:nvSpPr>
+          <p:cNvPr id="27" name="TextBox 26"/>
+          <p:cNvSpPr txBox="1"/>
+          <p:nvPr/>
+        </p:nvSpPr>
+        <p:spPr>
+          <a:xfrm>
+            <a:off x="9162288" y="4297680"/>
+            <a:ext cx="2286000" cy="365760"/>
+          </a:xfrm>
+          <a:prstGeom prst="rect">
+            <a:avLst/>
+          </a:prstGeom>
+          <a:noFill/>
+        </p:spPr>
+        <p:txBody>
+          <a:bodyPr wrap="square" lIns="0" rIns="0" tIns="0" bIns="0">
+            <a:spAutoFit/>
+          </a:bodyPr>
+          <a:lstStyle/>
+          <a:p>
+            <a:pPr algn="l">
+              <a:spcAft>
+                <a:spcPts val="0"/>
+              </a:spcAft>
+            </a:pPr>
+            <a:r>
+              <a:rPr sz="900" b="0" i="0">
+                <a:solidFill>
+                  <a:srgbClr val="1A2332"/>
+                </a:solidFill>
+                <a:latin typeface="Calibri"/>
+              </a:rPr>
+              <a:t>Emits run.sh, then mvn package</a:t>
+            </a:r>
+          </a:p>
+        </p:txBody>
+      </p:sp>
+      <p:sp>
+        <p:nvSpPr>
+          <p:cNvPr id="28" name="TextBox 27"/>
+          <p:cNvSpPr txBox="1"/>
+          <p:nvPr/>
+        </p:nvSpPr>
+        <p:spPr>
+          <a:xfrm>
+            <a:off x="566928" y="4882896"/>
+            <a:ext cx="11064240" cy="274320"/>
+          </a:xfrm>
+          <a:prstGeom prst="rect">
+            <a:avLst/>
+          </a:prstGeom>
+          <a:noFill/>
+        </p:spPr>
+        <p:txBody>
+          <a:bodyPr wrap="square" lIns="0" rIns="0" tIns="0" bIns="0">
+            <a:spAutoFit/>
+          </a:bodyPr>
+          <a:lstStyle/>
+          <a:p>
+            <a:pPr algn="l">
+              <a:spcAft>
+                <a:spcPts val="0"/>
+              </a:spcAft>
+            </a:pPr>
+            <a:r>
+              <a:rPr sz="1000" b="1" i="0">
+                <a:solidFill>
+                  <a:srgbClr val="667085"/>
+                </a:solidFill>
+                <a:latin typeface="Calibri"/>
+              </a:rPr>
+              <a:t>OPTIONS</a:t>
+            </a:r>
+          </a:p>
+        </p:txBody>
+      </p:sp>
+      <p:sp>
+        <p:nvSpPr>
+          <p:cNvPr id="29" name="Rounded Rectangle 28"/>
+          <p:cNvSpPr/>
+          <p:nvPr/>
+        </p:nvSpPr>
+        <p:spPr>
+          <a:xfrm>
+            <a:off x="566928" y="5175504"/>
+            <a:ext cx="11064240" cy="841248"/>
+          </a:xfrm>
+          <a:prstGeom prst="roundRect">
+            <a:avLst>
+              <a:gd name="adj" fmla="val 5000"/>
+            </a:avLst>
+          </a:prstGeom>
+          <a:solidFill>
+            <a:srgbClr val="F5F7FA"/>
+          </a:solidFill>
+          <a:ln w="15875">
+            <a:solidFill>
+              <a:srgbClr val="D8DEE6"/>
+            </a:solidFill>
+          </a:ln>
+          <a:effectLst/>
+        </p:spPr>
+        <p:style>
+          <a:lnRef idx="1">
+            <a:schemeClr val="accent1"/>
+          </a:lnRef>
+          <a:fillRef idx="3">
+            <a:schemeClr val="accent1"/>
+          </a:fillRef>
+          <a:effectRef idx="2">
+            <a:schemeClr val="accent1"/>
+          </a:effectRef>
+          <a:fontRef idx="minor">
+            <a:schemeClr val="lt1"/>
+          </a:fontRef>
+        </p:style>
+        <p:txBody>
+          <a:bodyPr rtlCol="0" anchor="ctr" wrap="square" lIns="164592"/>
+          <a:lstStyle/>
+          <a:p>
+            <a:pPr algn="l"/>
+            <a:r>
+              <a:rPr sz="1000">
+                <a:solidFill>
+                  <a:srgbClr val="1A2332"/>
+                </a:solidFill>
+                <a:latin typeface="Consolas"/>
+              </a:rPr>
+              <a:t>--out DIR     build elsewhere        --clean     wipe the output dir first</a:t>
+            </a:r>
+          </a:p>
+          <a:p>
+            <a:pPr algn="l"/>
+            <a:r>
+              <a:rPr sz="1000">
+                <a:solidFill>
+                  <a:srgbClr val="1A2332"/>
+                </a:solidFill>
+                <a:latin typeface="Consolas"/>
+              </a:rPr>
+              <a:t>--port N      override the HTTP port  --no-build  scaffold only, skip mvn</a:t>
+            </a:r>
+          </a:p>
+        </p:txBody>
+      </p:sp>
+      <p:sp>
+        <p:nvSpPr>
+          <p:cNvPr id="30" name="TextBox 29"/>
+          <p:cNvSpPr txBox="1"/>
+          <p:nvPr/>
+        </p:nvSpPr>
+        <p:spPr>
+          <a:xfrm>
+            <a:off x="566928" y="6236208"/>
+            <a:ext cx="11064240" cy="457200"/>
+          </a:xfrm>
+          <a:prstGeom prst="rect">
+            <a:avLst/>
+          </a:prstGeom>
+          <a:noFill/>
+        </p:spPr>
+        <p:txBody>
+          <a:bodyPr wrap="square" lIns="0" rIns="0" tIns="0" bIns="0">
+            <a:spAutoFit/>
+          </a:bodyPr>
+          <a:lstStyle/>
+          <a:p>
+            <a:pPr algn="l">
+              <a:spcAft>
+                <a:spcPts val="0"/>
+              </a:spcAft>
+            </a:pPr>
+            <a:r>
+              <a:rPr sz="1050" b="0" i="0">
+                <a:solidFill>
+                  <a:srgbClr val="1A2332"/>
+                </a:solidFill>
+                <a:latin typeface="Calibri"/>
+              </a:rPr>
+              <a:t>The policies and the YAML are never copied — CUGA FLO reads them live from the repo at runtime. Only the BPMN is compiled in, which is why just a model change needs a rebuild.</a:t>
+            </a:r>
+          </a:p>
+        </p:txBody>
+      </p:sp>
+    </p:spTree>
+  </p:cSld>
+  <p:clrMapOvr>
+    <a:masterClrMapping/>
+  </p:clrMapOvr>
+</p:sld>
+</file>
+
+<file path=ppt/slides/slide4.xml><?xml version="1.0" encoding="utf-8"?>
+<p:sld xmlns:a="http://schemas.openxmlformats.org/drawingml/2006/main" xmlns:p="http://schemas.openxmlformats.org/presentationml/2006/main" xmlns:r="http://schemas.openxmlformats.org/officeDocument/2006/relationships">
+  <p:cSld>
+    <p:spTree>
+      <p:nvGrpSpPr>
+        <p:cNvPr id="1" name=""/>
+        <p:cNvGrpSpPr/>
+        <p:nvPr/>
+      </p:nvGrpSpPr>
+      <p:grpSpPr/>
+      <p:sp>
+        <p:nvSpPr>
+          <p:cNvPr id="2" name="TextBox 1"/>
+          <p:cNvSpPr txBox="1"/>
+          <p:nvPr/>
+        </p:nvSpPr>
+        <p:spPr>
+          <a:xfrm>
+            <a:off x="566928" y="384048"/>
+            <a:ext cx="10972800" cy="274320"/>
+          </a:xfrm>
+          <a:prstGeom prst="rect">
+            <a:avLst/>
+          </a:prstGeom>
+          <a:noFill/>
+        </p:spPr>
+        <p:txBody>
+          <a:bodyPr wrap="square" lIns="0" rIns="0" tIns="0" bIns="0">
+            <a:spAutoFit/>
+          </a:bodyPr>
+          <a:lstStyle/>
+          <a:p>
+            <a:pPr algn="l">
+              <a:spcAft>
+                <a:spcPts val="0"/>
+              </a:spcAft>
+            </a:pPr>
+            <a:r>
+              <a:rPr sz="1050" b="1" i="0">
+                <a:solidFill>
+                  <a:srgbClr val="3B7DD8"/>
+                </a:solidFill>
+                <a:latin typeface="Calibri"/>
+              </a:rPr>
+              <a:t>CUGA FLO · KOGITO TOOLING</a:t>
+            </a:r>
+          </a:p>
+        </p:txBody>
+      </p:sp>
+      <p:sp>
+        <p:nvSpPr>
+          <p:cNvPr id="3" name="TextBox 2"/>
+          <p:cNvSpPr txBox="1"/>
+          <p:nvPr/>
+        </p:nvSpPr>
+        <p:spPr>
+          <a:xfrm>
+            <a:off x="566928" y="658368"/>
+            <a:ext cx="10972800" cy="548640"/>
+          </a:xfrm>
+          <a:prstGeom prst="rect">
+            <a:avLst/>
+          </a:prstGeom>
+          <a:noFill/>
+        </p:spPr>
+        <p:txBody>
+          <a:bodyPr wrap="square" lIns="0" rIns="0" tIns="0" bIns="0">
+            <a:spAutoFit/>
+          </a:bodyPr>
+          <a:lstStyle/>
+          <a:p>
+            <a:pPr algn="l">
+              <a:spcAft>
+                <a:spcPts val="0"/>
+              </a:spcAft>
+            </a:pPr>
+            <a:r>
+              <a:rPr sz="2800" b="1" i="0">
+                <a:solidFill>
+                  <a:srgbClr val="1A2332"/>
+                </a:solidFill>
+                <a:latin typeface="Calibri"/>
+              </a:rPr>
+              <a:t>run.sh — starting the built service</a:t>
+            </a:r>
+          </a:p>
+        </p:txBody>
+      </p:sp>
+      <p:sp>
+        <p:nvSpPr>
+          <p:cNvPr id="4" name="Rectangle 3"/>
+          <p:cNvSpPr/>
+          <p:nvPr/>
+        </p:nvSpPr>
+        <p:spPr>
+          <a:xfrm>
+            <a:off x="566928" y="1298448"/>
+            <a:ext cx="11064240" cy="9525"/>
+          </a:xfrm>
+          <a:prstGeom prst="rect">
+            <a:avLst/>
+          </a:prstGeom>
+          <a:solidFill>
+            <a:srgbClr val="D8DEE6"/>
+          </a:solidFill>
+          <a:ln>
+            <a:noFill/>
+          </a:ln>
+          <a:effectLst/>
+        </p:spPr>
+        <p:style>
+          <a:lnRef idx="1">
+            <a:schemeClr val="accent1"/>
+          </a:lnRef>
+          <a:fillRef idx="3">
+            <a:schemeClr val="accent1"/>
+          </a:fillRef>
+          <a:effectRef idx="2">
+            <a:schemeClr val="accent1"/>
+          </a:effectRef>
+          <a:fontRef idx="minor">
+            <a:schemeClr val="lt1"/>
+          </a:fontRef>
+        </p:style>
+        <p:txBody>
+          <a:bodyPr rtlCol="0" anchor="ctr"/>
+          <a:lstStyle/>
+          <a:p>
+            <a:pPr algn="ctr"/>
+          </a:p>
+        </p:txBody>
+      </p:sp>
+      <p:sp>
+        <p:nvSpPr>
+          <p:cNvPr id="5" name="TextBox 4"/>
+          <p:cNvSpPr txBox="1"/>
+          <p:nvPr/>
+        </p:nvSpPr>
+        <p:spPr>
+          <a:xfrm>
+            <a:off x="566928" y="1481328"/>
+            <a:ext cx="11064240" cy="365760"/>
+          </a:xfrm>
+          <a:prstGeom prst="rect">
+            <a:avLst/>
+          </a:prstGeom>
+          <a:noFill/>
+        </p:spPr>
+        <p:txBody>
+          <a:bodyPr wrap="square" lIns="0" rIns="0" tIns="0" bIns="0">
+            <a:spAutoFit/>
+          </a:bodyPr>
+          <a:lstStyle/>
+          <a:p>
+            <a:pPr algn="l">
+              <a:spcAft>
+                <a:spcPts val="0"/>
+              </a:spcAft>
+            </a:pPr>
+            <a:r>
+              <a:rPr sz="1250" b="0" i="0">
+                <a:solidFill>
+                  <a:srgbClr val="667085"/>
+                </a:solidFill>
+                <a:latin typeface="Calibri"/>
+              </a:rPr>
+              <a:t>The build emits a launcher next to the project. It exists for one reason: to pin the JDK the service was built with.</a:t>
+            </a:r>
+          </a:p>
+        </p:txBody>
+      </p:sp>
+      <p:sp>
+        <p:nvSpPr>
+          <p:cNvPr id="6" name="Rounded Rectangle 5"/>
+          <p:cNvSpPr/>
+          <p:nvPr/>
+        </p:nvSpPr>
+        <p:spPr>
+          <a:xfrm>
+            <a:off x="566928" y="2011680"/>
+            <a:ext cx="6583680" cy="1572768"/>
+          </a:xfrm>
+          <a:prstGeom prst="roundRect">
+            <a:avLst>
+              <a:gd name="adj" fmla="val 5000"/>
+            </a:avLst>
+          </a:prstGeom>
+          <a:solidFill>
+            <a:srgbClr val="F5F7FA"/>
+          </a:solidFill>
+          <a:ln w="15875">
+            <a:solidFill>
+              <a:srgbClr val="D8DEE6"/>
+            </a:solidFill>
+          </a:ln>
+          <a:effectLst/>
+        </p:spPr>
+        <p:style>
+          <a:lnRef idx="1">
+            <a:schemeClr val="accent1"/>
+          </a:lnRef>
+          <a:fillRef idx="3">
+            <a:schemeClr val="accent1"/>
+          </a:fillRef>
+          <a:effectRef idx="2">
+            <a:schemeClr val="accent1"/>
+          </a:effectRef>
+          <a:fontRef idx="minor">
+            <a:schemeClr val="lt1"/>
+          </a:fontRef>
+        </p:style>
+        <p:txBody>
+          <a:bodyPr rtlCol="0" anchor="ctr" wrap="square" lIns="164592"/>
+          <a:lstStyle/>
+          <a:p>
+            <a:pPr algn="l"/>
+            <a:r>
+              <a:rPr sz="1000">
+                <a:solidFill>
+                  <a:srgbClr val="667085"/>
+                </a:solidFill>
+                <a:latin typeface="Consolas"/>
+              </a:rPr>
+              <a:t>#!/usr/bin/env bash</a:t>
+            </a:r>
+          </a:p>
+          <a:p>
+            <a:pPr algn="l"/>
+            <a:r>
+              <a:rPr sz="1000">
+                <a:solidFill>
+                  <a:srgbClr val="1A2332"/>
+                </a:solidFill>
+                <a:latin typeface="Consolas"/>
+              </a:rPr>
+              <a:t>set -euo pipefail</a:t>
+            </a:r>
+          </a:p>
+          <a:p>
+            <a:pPr algn="l"/>
+            <a:r>
+              <a:rPr sz="1000">
+                <a:solidFill>
+                  <a:srgbClr val="1A2332"/>
+                </a:solidFill>
+                <a:latin typeface="Consolas"/>
+              </a:rPr>
+              <a:t>export JAVA_HOME="/opt/homebrew/opt/openjdk@17"</a:t>
+            </a:r>
+          </a:p>
+          <a:p>
+            <a:pPr algn="l"/>
+            <a:r>
+              <a:rPr sz="1000">
+                <a:solidFill>
+                  <a:srgbClr val="1A2332"/>
+                </a:solidFill>
+                <a:latin typeface="Consolas"/>
+              </a:rPr>
+              <a:t>export PATH="$JAVA_HOME/bin:$PATH"</a:t>
+            </a:r>
+          </a:p>
+          <a:p>
+            <a:pPr algn="l"/>
+            <a:r>
+              <a:rPr sz="1000">
+                <a:solidFill>
+                  <a:srgbClr val="1A2332"/>
+                </a:solidFill>
+                <a:latin typeface="Consolas"/>
+              </a:rPr>
+              <a:t>exec java -jar ".../target/quarkus-app/quarkus-run.jar" "$@"</a:t>
+            </a:r>
+          </a:p>
+        </p:txBody>
+      </p:sp>
+      <p:sp>
+        <p:nvSpPr>
+          <p:cNvPr id="7" name="Rounded Rectangle 6"/>
+          <p:cNvSpPr/>
+          <p:nvPr/>
+        </p:nvSpPr>
+        <p:spPr>
+          <a:xfrm>
+            <a:off x="7424927" y="2011680"/>
+            <a:ext cx="4206240" cy="1572768"/>
+          </a:xfrm>
+          <a:prstGeom prst="roundRect">
+            <a:avLst>
+              <a:gd name="adj" fmla="val 5000"/>
+            </a:avLst>
+          </a:prstGeom>
+          <a:solidFill>
+            <a:srgbClr val="FFF4E0"/>
+          </a:solidFill>
+          <a:ln w="15875">
+            <a:solidFill>
+              <a:srgbClr val="D8913B"/>
+            </a:solidFill>
+          </a:ln>
+          <a:effectLst/>
+        </p:spPr>
+        <p:style>
+          <a:lnRef idx="1">
+            <a:schemeClr val="accent1"/>
+          </a:lnRef>
+          <a:fillRef idx="3">
+            <a:schemeClr val="accent1"/>
+          </a:fillRef>
+          <a:effectRef idx="2">
+            <a:schemeClr val="accent1"/>
+          </a:effectRef>
+          <a:fontRef idx="minor">
+            <a:schemeClr val="lt1"/>
+          </a:fontRef>
+        </p:style>
+        <p:txBody>
+          <a:bodyPr rtlCol="0" anchor="ctr"/>
+          <a:lstStyle/>
+          <a:p>
+            <a:pPr algn="ctr"/>
+          </a:p>
+        </p:txBody>
+      </p:sp>
+      <p:sp>
+        <p:nvSpPr>
+          <p:cNvPr id="8" name="TextBox 7"/>
+          <p:cNvSpPr txBox="1"/>
+          <p:nvPr/>
+        </p:nvSpPr>
+        <p:spPr>
+          <a:xfrm>
+            <a:off x="7699248" y="2212848"/>
+            <a:ext cx="3657600" cy="274320"/>
+          </a:xfrm>
+          <a:prstGeom prst="rect">
+            <a:avLst/>
+          </a:prstGeom>
+          <a:noFill/>
+        </p:spPr>
+        <p:txBody>
+          <a:bodyPr wrap="square" lIns="0" rIns="0" tIns="0" bIns="0">
+            <a:spAutoFit/>
+          </a:bodyPr>
+          <a:lstStyle/>
+          <a:p>
+            <a:pPr algn="l">
+              <a:spcAft>
+                <a:spcPts val="0"/>
+              </a:spcAft>
+            </a:pPr>
+            <a:r>
+              <a:rPr sz="1000" b="1" i="0">
+                <a:solidFill>
+                  <a:srgbClr val="D8913B"/>
+                </a:solidFill>
+                <a:latin typeface="Calibri"/>
+              </a:rPr>
+              <a:t>WHY IT IS GENERATED</a:t>
+            </a:r>
+          </a:p>
+        </p:txBody>
+      </p:sp>
+      <p:sp>
+        <p:nvSpPr>
+          <p:cNvPr id="9" name="TextBox 8"/>
+          <p:cNvSpPr txBox="1"/>
+          <p:nvPr/>
+        </p:nvSpPr>
+        <p:spPr>
+          <a:xfrm>
+            <a:off x="7699248" y="2523744"/>
+            <a:ext cx="3657600" cy="914400"/>
+          </a:xfrm>
+          <a:prstGeom prst="rect">
+            <a:avLst/>
+          </a:prstGeom>
+          <a:noFill/>
+        </p:spPr>
+        <p:txBody>
+          <a:bodyPr wrap="square" lIns="0" rIns="0" tIns="0" bIns="0">
+            <a:spAutoFit/>
+          </a:bodyPr>
+          <a:lstStyle/>
+          <a:p>
+            <a:pPr algn="l">
+              <a:spcAft>
+                <a:spcPts val="0"/>
+              </a:spcAft>
+            </a:pPr>
+            <a:r>
+              <a:rPr sz="950" b="0" i="0">
+                <a:solidFill>
+                  <a:srgbClr val="1A2332"/>
+                </a:solidFill>
+                <a:latin typeface="Calibri"/>
+              </a:rPr>
+              <a:t>JAVA_HOME exported inside the build script does not survive into your shell. A bare java -jar then picks up the system JDK 11 and dies with UnsupportedClassVersionError: class file version 61.0.</a:t>
+            </a:r>
+          </a:p>
+        </p:txBody>
+      </p:sp>
+      <p:sp>
+        <p:nvSpPr>
+          <p:cNvPr id="10" name="TextBox 9"/>
+          <p:cNvSpPr txBox="1"/>
+          <p:nvPr/>
+        </p:nvSpPr>
+        <p:spPr>
+          <a:xfrm>
+            <a:off x="566928" y="3822191"/>
+            <a:ext cx="5394960" cy="274320"/>
+          </a:xfrm>
+          <a:prstGeom prst="rect">
+            <a:avLst/>
+          </a:prstGeom>
+          <a:noFill/>
+        </p:spPr>
+        <p:txBody>
+          <a:bodyPr wrap="square" lIns="0" rIns="0" tIns="0" bIns="0">
+            <a:spAutoFit/>
+          </a:bodyPr>
+          <a:lstStyle/>
+          <a:p>
+            <a:pPr algn="l">
+              <a:spcAft>
+                <a:spcPts val="0"/>
+              </a:spcAft>
+            </a:pPr>
+            <a:r>
+              <a:rPr sz="1000" b="1" i="0">
+                <a:solidFill>
+                  <a:srgbClr val="667085"/>
+                </a:solidFill>
+                <a:latin typeface="Calibri"/>
+              </a:rPr>
+              <a:t>THE THREE-STEP LOOP</a:t>
+            </a:r>
+          </a:p>
+        </p:txBody>
+      </p:sp>
+      <p:sp>
+        <p:nvSpPr>
+          <p:cNvPr id="11" name="Rounded Rectangle 10"/>
+          <p:cNvSpPr/>
+          <p:nvPr/>
+        </p:nvSpPr>
+        <p:spPr>
+          <a:xfrm>
+            <a:off x="566928" y="4133087"/>
+            <a:ext cx="5394960" cy="1371600"/>
+          </a:xfrm>
+          <a:prstGeom prst="roundRect">
+            <a:avLst>
+              <a:gd name="adj" fmla="val 5000"/>
+            </a:avLst>
+          </a:prstGeom>
+          <a:solidFill>
+            <a:srgbClr val="F5F7FA"/>
+          </a:solidFill>
+          <a:ln w="15875">
+            <a:solidFill>
+              <a:srgbClr val="D8DEE6"/>
+            </a:solidFill>
+          </a:ln>
+          <a:effectLst/>
+        </p:spPr>
+        <p:style>
+          <a:lnRef idx="1">
+            <a:schemeClr val="accent1"/>
+          </a:lnRef>
+          <a:fillRef idx="3">
+            <a:schemeClr val="accent1"/>
+          </a:fillRef>
+          <a:effectRef idx="2">
+            <a:schemeClr val="accent1"/>
+          </a:effectRef>
+          <a:fontRef idx="minor">
+            <a:schemeClr val="lt1"/>
+          </a:fontRef>
+        </p:style>
+        <p:txBody>
+          <a:bodyPr rtlCol="0" anchor="ctr" wrap="square" lIns="164592"/>
+          <a:lstStyle/>
+          <a:p>
+            <a:pPr algn="l"/>
+            <a:r>
+              <a:rPr sz="950">
+                <a:solidFill>
+                  <a:srgbClr val="667085"/>
+                </a:solidFill>
+                <a:latin typeface="Consolas"/>
+              </a:rPr>
+              <a:t># 1  build   (only after a BPMN change)</a:t>
+            </a:r>
+          </a:p>
+          <a:p>
+            <a:pPr algn="l"/>
+            <a:r>
+              <a:rPr sz="950">
+                <a:solidFill>
+                  <a:srgbClr val="1A2332"/>
+                </a:solidFill>
+                <a:latin typeface="Consolas"/>
+              </a:rPr>
+              <a:t>./scripts/build_kogito_app.sh &lt;app&gt;</a:t>
+            </a:r>
+          </a:p>
+          <a:p>
+            <a:pPr algn="l"/>
+            <a:r>
+              <a:rPr sz="950">
+                <a:solidFill>
+                  <a:srgbClr val="667085"/>
+                </a:solidFill>
+                <a:latin typeface="Consolas"/>
+              </a:rPr>
+              <a:t># 2  run     (leave it running)</a:t>
+            </a:r>
+          </a:p>
+          <a:p>
+            <a:pPr algn="l"/>
+            <a:r>
+              <a:rPr sz="950">
+                <a:solidFill>
+                  <a:srgbClr val="1A2332"/>
+                </a:solidFill>
+                <a:latin typeface="Consolas"/>
+              </a:rPr>
+              <a:t>build/kogito/&lt;app&gt;/run.sh</a:t>
+            </a:r>
+          </a:p>
+          <a:p>
+            <a:pPr algn="l"/>
+            <a:r>
+              <a:rPr sz="950">
+                <a:solidFill>
+                  <a:srgbClr val="667085"/>
+                </a:solidFill>
+                <a:latin typeface="Consolas"/>
+              </a:rPr>
+              <a:t># 3  drive   (another terminal)</a:t>
+            </a:r>
+          </a:p>
+          <a:p>
+            <a:pPr algn="l"/>
+            <a:r>
+              <a:rPr sz="950">
+                <a:solidFill>
+                  <a:srgbClr val="1A2332"/>
+                </a:solidFill>
+                <a:latin typeface="Consolas"/>
+              </a:rPr>
+              <a:t>cuga start flow_agent_inline &lt;app&gt;</a:t>
+            </a:r>
+          </a:p>
+        </p:txBody>
+      </p:sp>
+      <p:sp>
+        <p:nvSpPr>
+          <p:cNvPr id="12" name="Rounded Rectangle 11"/>
+          <p:cNvSpPr/>
+          <p:nvPr/>
+        </p:nvSpPr>
+        <p:spPr>
+          <a:xfrm>
+            <a:off x="6236208" y="4133087"/>
+            <a:ext cx="5394960" cy="1371600"/>
+          </a:xfrm>
+          <a:prstGeom prst="roundRect">
+            <a:avLst>
+              <a:gd name="adj" fmla="val 5000"/>
+            </a:avLst>
+          </a:prstGeom>
+          <a:solidFill>
+            <a:srgbClr val="FFFFFF"/>
+          </a:solidFill>
+          <a:ln w="15875">
+            <a:solidFill>
+              <a:srgbClr val="D8DEE6"/>
+            </a:solidFill>
+          </a:ln>
+          <a:effectLst/>
+        </p:spPr>
+        <p:style>
+          <a:lnRef idx="1">
+            <a:schemeClr val="accent1"/>
+          </a:lnRef>
+          <a:fillRef idx="3">
+            <a:schemeClr val="accent1"/>
+          </a:fillRef>
+          <a:effectRef idx="2">
+            <a:schemeClr val="accent1"/>
+          </a:effectRef>
+          <a:fontRef idx="minor">
+            <a:schemeClr val="lt1"/>
+          </a:fontRef>
+        </p:style>
+        <p:txBody>
+          <a:bodyPr rtlCol="0" anchor="ctr"/>
+          <a:lstStyle/>
+          <a:p>
+            <a:pPr algn="ctr"/>
+          </a:p>
+        </p:txBody>
+      </p:sp>
+      <p:sp>
+        <p:nvSpPr>
+          <p:cNvPr id="13" name="TextBox 12"/>
+          <p:cNvSpPr txBox="1"/>
+          <p:nvPr/>
+        </p:nvSpPr>
+        <p:spPr>
+          <a:xfrm>
+            <a:off x="6510528" y="4315968"/>
+            <a:ext cx="4846320" cy="274320"/>
+          </a:xfrm>
+          <a:prstGeom prst="rect">
+            <a:avLst/>
+          </a:prstGeom>
+          <a:noFill/>
+        </p:spPr>
+        <p:txBody>
+          <a:bodyPr wrap="square" lIns="0" rIns="0" tIns="0" bIns="0">
+            <a:spAutoFit/>
+          </a:bodyPr>
+          <a:lstStyle/>
+          <a:p>
+            <a:pPr algn="l">
+              <a:spcAft>
+                <a:spcPts val="0"/>
+              </a:spcAft>
+            </a:pPr>
+            <a:r>
+              <a:rPr sz="1000" b="1" i="0">
+                <a:solidFill>
+                  <a:srgbClr val="667085"/>
+                </a:solidFill>
+                <a:latin typeface="Calibri"/>
+              </a:rPr>
+              <a:t>WHAT COMES UP</a:t>
+            </a:r>
+          </a:p>
+        </p:txBody>
+      </p:sp>
+      <p:sp>
+        <p:nvSpPr>
+          <p:cNvPr id="14" name="TextBox 13"/>
+          <p:cNvSpPr txBox="1"/>
+          <p:nvPr/>
+        </p:nvSpPr>
+        <p:spPr>
+          <a:xfrm>
+            <a:off x="6510528" y="4626864"/>
+            <a:ext cx="1965960" cy="201168"/>
+          </a:xfrm>
+          <a:prstGeom prst="rect">
+            <a:avLst/>
+          </a:prstGeom>
+          <a:noFill/>
+        </p:spPr>
+        <p:txBody>
+          <a:bodyPr wrap="square" lIns="0" rIns="0" tIns="0" bIns="0">
+            <a:spAutoFit/>
+          </a:bodyPr>
+          <a:lstStyle/>
+          <a:p>
+            <a:pPr algn="l">
+              <a:spcAft>
+                <a:spcPts val="0"/>
+              </a:spcAft>
+            </a:pPr>
+            <a:r>
+              <a:rPr sz="950" b="1" i="0">
+                <a:solidFill>
+                  <a:srgbClr val="1A2332"/>
+                </a:solidFill>
+                <a:latin typeface="Calibri"/>
+              </a:rPr>
+              <a:t>Quarkus service</a:t>
+            </a:r>
+          </a:p>
+        </p:txBody>
+      </p:sp>
+      <p:sp>
+        <p:nvSpPr>
+          <p:cNvPr id="15" name="TextBox 14"/>
+          <p:cNvSpPr txBox="1"/>
+          <p:nvPr/>
+        </p:nvSpPr>
+        <p:spPr>
+          <a:xfrm>
+            <a:off x="8522208" y="4626864"/>
+            <a:ext cx="2834640" cy="201168"/>
+          </a:xfrm>
+          <a:prstGeom prst="rect">
+            <a:avLst/>
+          </a:prstGeom>
+          <a:noFill/>
+        </p:spPr>
+        <p:txBody>
+          <a:bodyPr wrap="square" lIns="0" rIns="0" tIns="0" bIns="0">
+            <a:spAutoFit/>
+          </a:bodyPr>
+          <a:lstStyle/>
+          <a:p>
+            <a:pPr algn="l">
+              <a:spcAft>
+                <a:spcPts val="0"/>
+              </a:spcAft>
+            </a:pPr>
+            <a:r>
+              <a:rPr sz="950" b="0" i="0">
+                <a:solidFill>
+                  <a:srgbClr val="667085"/>
+                </a:solidFill>
+                <a:latin typeface="Calibri"/>
+              </a:rPr>
+              <a:t>port 8081 — 8080 is Flowable's</a:t>
+            </a:r>
+          </a:p>
+        </p:txBody>
+      </p:sp>
+      <p:sp>
+        <p:nvSpPr>
+          <p:cNvPr id="16" name="TextBox 15"/>
+          <p:cNvSpPr txBox="1"/>
+          <p:nvPr/>
+        </p:nvSpPr>
+        <p:spPr>
+          <a:xfrm>
+            <a:off x="6510528" y="4846320"/>
+            <a:ext cx="1965960" cy="201168"/>
+          </a:xfrm>
+          <a:prstGeom prst="rect">
+            <a:avLst/>
+          </a:prstGeom>
+          <a:noFill/>
+        </p:spPr>
+        <p:txBody>
+          <a:bodyPr wrap="square" lIns="0" rIns="0" tIns="0" bIns="0">
+            <a:spAutoFit/>
+          </a:bodyPr>
+          <a:lstStyle/>
+          <a:p>
+            <a:pPr algn="l">
+              <a:spcAft>
+                <a:spcPts val="0"/>
+              </a:spcAft>
+            </a:pPr>
+            <a:r>
+              <a:rPr sz="950" b="1" i="0">
+                <a:solidFill>
+                  <a:srgbClr val="1A2332"/>
+                </a:solidFill>
+                <a:latin typeface="Calibri"/>
+              </a:rPr>
+              <a:t>Generated REST</a:t>
+            </a:r>
+          </a:p>
+        </p:txBody>
+      </p:sp>
+      <p:sp>
+        <p:nvSpPr>
+          <p:cNvPr id="17" name="TextBox 16"/>
+          <p:cNvSpPr txBox="1"/>
+          <p:nvPr/>
+        </p:nvSpPr>
+        <p:spPr>
+          <a:xfrm>
+            <a:off x="8522208" y="4846320"/>
+            <a:ext cx="2834640" cy="201168"/>
+          </a:xfrm>
+          <a:prstGeom prst="rect">
+            <a:avLst/>
+          </a:prstGeom>
+          <a:noFill/>
+        </p:spPr>
+        <p:txBody>
+          <a:bodyPr wrap="square" lIns="0" rIns="0" tIns="0" bIns="0">
+            <a:spAutoFit/>
+          </a:bodyPr>
+          <a:lstStyle/>
+          <a:p>
+            <a:pPr algn="l">
+              <a:spcAft>
+                <a:spcPts val="0"/>
+              </a:spcAft>
+            </a:pPr>
+            <a:r>
+              <a:rPr sz="950" b="0" i="0">
+                <a:solidFill>
+                  <a:srgbClr val="667085"/>
+                </a:solidFill>
+                <a:latin typeface="Calibri"/>
+              </a:rPr>
+              <a:t>POST /&lt;processId&gt; starts an instance</a:t>
+            </a:r>
+          </a:p>
+        </p:txBody>
+      </p:sp>
+      <p:sp>
+        <p:nvSpPr>
+          <p:cNvPr id="18" name="TextBox 17"/>
+          <p:cNvSpPr txBox="1"/>
+          <p:nvPr/>
+        </p:nvSpPr>
+        <p:spPr>
+          <a:xfrm>
+            <a:off x="6510528" y="5065775"/>
+            <a:ext cx="1965960" cy="201168"/>
+          </a:xfrm>
+          <a:prstGeom prst="rect">
+            <a:avLst/>
+          </a:prstGeom>
+          <a:noFill/>
+        </p:spPr>
+        <p:txBody>
+          <a:bodyPr wrap="square" lIns="0" rIns="0" tIns="0" bIns="0">
+            <a:spAutoFit/>
+          </a:bodyPr>
+          <a:lstStyle/>
+          <a:p>
+            <a:pPr algn="l">
+              <a:spcAft>
+                <a:spcPts val="0"/>
+              </a:spcAft>
+            </a:pPr>
+            <a:r>
+              <a:rPr sz="950" b="1" i="0">
+                <a:solidFill>
+                  <a:srgbClr val="1A2332"/>
+                </a:solidFill>
+                <a:latin typeface="Calibri"/>
+              </a:rPr>
+              <a:t>Embedded Data Index</a:t>
+            </a:r>
+          </a:p>
+        </p:txBody>
+      </p:sp>
+      <p:sp>
+        <p:nvSpPr>
+          <p:cNvPr id="19" name="TextBox 18"/>
+          <p:cNvSpPr txBox="1"/>
+          <p:nvPr/>
+        </p:nvSpPr>
+        <p:spPr>
+          <a:xfrm>
+            <a:off x="8522208" y="5065775"/>
+            <a:ext cx="2834640" cy="201168"/>
+          </a:xfrm>
+          <a:prstGeom prst="rect">
+            <a:avLst/>
+          </a:prstGeom>
+          <a:noFill/>
+        </p:spPr>
+        <p:txBody>
+          <a:bodyPr wrap="square" lIns="0" rIns="0" tIns="0" bIns="0">
+            <a:spAutoFit/>
+          </a:bodyPr>
+          <a:lstStyle/>
+          <a:p>
+            <a:pPr algn="l">
+              <a:spcAft>
+                <a:spcPts val="0"/>
+              </a:spcAft>
+            </a:pPr>
+            <a:r>
+              <a:rPr sz="950" b="0" i="0">
+                <a:solidFill>
+                  <a:srgbClr val="667085"/>
+                </a:solidFill>
+                <a:latin typeface="Calibri"/>
+              </a:rPr>
+              <a:t>/graphql — every run, node by node</a:t>
+            </a:r>
+          </a:p>
+        </p:txBody>
+      </p:sp>
+      <p:sp>
+        <p:nvSpPr>
+          <p:cNvPr id="20" name="TextBox 19"/>
+          <p:cNvSpPr txBox="1"/>
+          <p:nvPr/>
+        </p:nvSpPr>
+        <p:spPr>
+          <a:xfrm>
+            <a:off x="6510528" y="5285231"/>
+            <a:ext cx="1965960" cy="201168"/>
+          </a:xfrm>
+          <a:prstGeom prst="rect">
+            <a:avLst/>
+          </a:prstGeom>
+          <a:noFill/>
+        </p:spPr>
+        <p:txBody>
+          <a:bodyPr wrap="square" lIns="0" rIns="0" tIns="0" bIns="0">
+            <a:spAutoFit/>
+          </a:bodyPr>
+          <a:lstStyle/>
+          <a:p>
+            <a:pPr algn="l">
+              <a:spcAft>
+                <a:spcPts val="0"/>
+              </a:spcAft>
+            </a:pPr>
+            <a:r>
+              <a:rPr sz="950" b="1" i="0">
+                <a:solidFill>
+                  <a:srgbClr val="1A2332"/>
+                </a:solidFill>
+                <a:latin typeface="Calibri"/>
+              </a:rPr>
+              <a:t>MCP callback</a:t>
+            </a:r>
+          </a:p>
+        </p:txBody>
+      </p:sp>
+      <p:sp>
+        <p:nvSpPr>
+          <p:cNvPr id="21" name="TextBox 20"/>
+          <p:cNvSpPr txBox="1"/>
+          <p:nvPr/>
+        </p:nvSpPr>
+        <p:spPr>
+          <a:xfrm>
+            <a:off x="8522208" y="5285231"/>
+            <a:ext cx="2834640" cy="201168"/>
+          </a:xfrm>
+          <a:prstGeom prst="rect">
+            <a:avLst/>
+          </a:prstGeom>
+          <a:noFill/>
+        </p:spPr>
+        <p:txBody>
+          <a:bodyPr wrap="square" lIns="0" rIns="0" tIns="0" bIns="0">
+            <a:spAutoFit/>
+          </a:bodyPr>
+          <a:lstStyle/>
+          <a:p>
+            <a:pPr algn="l">
+              <a:spcAft>
+                <a:spcPts val="0"/>
+              </a:spcAft>
+            </a:pPr>
+            <a:r>
+              <a:rPr sz="950" b="0" i="0">
+                <a:solidFill>
+                  <a:srgbClr val="667085"/>
+                </a:solidFill>
+                <a:latin typeface="Calibri"/>
+              </a:rPr>
+              <a:t>the service calls back on :8090/mcp</a:t>
+            </a:r>
+          </a:p>
+        </p:txBody>
+      </p:sp>
+      <p:sp>
+        <p:nvSpPr>
+          <p:cNvPr id="22" name="TextBox 21"/>
+          <p:cNvSpPr txBox="1"/>
+          <p:nvPr/>
+        </p:nvSpPr>
+        <p:spPr>
+          <a:xfrm>
+            <a:off x="566928" y="5742432"/>
+            <a:ext cx="11064240" cy="457200"/>
+          </a:xfrm>
+          <a:prstGeom prst="rect">
+            <a:avLst/>
+          </a:prstGeom>
+          <a:noFill/>
+        </p:spPr>
+        <p:txBody>
+          <a:bodyPr wrap="square" lIns="0" rIns="0" tIns="0" bIns="0">
+            <a:spAutoFit/>
+          </a:bodyPr>
+          <a:lstStyle/>
+          <a:p>
+            <a:pPr algn="l">
+              <a:spcAft>
+                <a:spcPts val="0"/>
+              </a:spcAft>
+            </a:pPr>
+            <a:r>
+              <a:rPr sz="1050" b="0" i="0">
+                <a:solidFill>
+                  <a:srgbClr val="1A2332"/>
+                </a:solidFill>
+                <a:latin typeface="Calibri"/>
+              </a:rPr>
+              <a:t>Kogito compiles BPMN at build time, so the service is the deployment unit — there is no runtime deploy. Editing a policy or the YAML needs no rebuild; editing the model does.</a:t>
             </a:r>
           </a:p>
         </p:txBody>

--- a/docs/diagrams/cuga-flo-kogito-integration.pptx
+++ b/docs/diagrams/cuga-flo-kogito-integration.pptx
@@ -5623,7 +5623,7 @@
               </a:spcAft>
             </a:pPr>
             <a:r>
-              <a:rPr sz="1050" b="1" i="0">
+              <a:rPr sz="1050" b="1">
                 <a:solidFill>
                   <a:srgbClr val="3B7DD8"/>
                 </a:solidFill>
@@ -5662,7 +5662,7 @@
               </a:spcAft>
             </a:pPr>
             <a:r>
-              <a:rPr sz="2800" b="1" i="0">
+              <a:rPr sz="2800" b="1">
                 <a:solidFill>
                   <a:srgbClr val="1A2332"/>
                 </a:solidFill>
@@ -5745,7 +5745,7 @@
               </a:spcAft>
             </a:pPr>
             <a:r>
-              <a:rPr sz="1250" b="0" i="0">
+              <a:rPr sz="1250" b="0">
                 <a:solidFill>
                   <a:srgbClr val="667085"/>
                 </a:solidFill>
@@ -5885,7 +5885,7 @@
               </a:spcAft>
             </a:pPr>
             <a:r>
-              <a:rPr sz="950" b="0" i="0">
+              <a:rPr sz="950" b="0">
                 <a:solidFill>
                   <a:srgbClr val="1A2332"/>
                 </a:solidFill>
@@ -5901,7 +5901,7 @@
               </a:spcAft>
             </a:pPr>
             <a:r>
-              <a:rPr sz="950" b="0" i="0">
+              <a:rPr sz="950" b="0">
                 <a:solidFill>
                   <a:srgbClr val="1A2332"/>
                 </a:solidFill>
@@ -5917,7 +5917,7 @@
               </a:spcAft>
             </a:pPr>
             <a:r>
-              <a:rPr sz="950" b="0" i="0">
+              <a:rPr sz="950" b="0">
                 <a:solidFill>
                   <a:srgbClr val="1A2332"/>
                 </a:solidFill>
@@ -5933,7 +5933,7 @@
               </a:spcAft>
             </a:pPr>
             <a:r>
-              <a:rPr sz="950" b="0" i="0">
+              <a:rPr sz="950" b="0">
                 <a:solidFill>
                   <a:srgbClr val="1A2332"/>
                 </a:solidFill>
@@ -5949,7 +5949,7 @@
               </a:spcAft>
             </a:pPr>
             <a:r>
-              <a:rPr sz="950" b="0" i="0">
+              <a:rPr sz="950" b="0">
                 <a:solidFill>
                   <a:srgbClr val="1A2332"/>
                 </a:solidFill>
@@ -5965,7 +5965,7 @@
               </a:spcAft>
             </a:pPr>
             <a:r>
-              <a:rPr sz="950" b="0" i="0">
+              <a:rPr sz="950" b="0">
                 <a:solidFill>
                   <a:srgbClr val="1A2332"/>
                 </a:solidFill>
@@ -5981,7 +5981,7 @@
               </a:spcAft>
             </a:pPr>
             <a:r>
-              <a:rPr sz="950" b="0" i="0">
+              <a:rPr sz="950" b="0">
                 <a:solidFill>
                   <a:srgbClr val="1A2332"/>
                 </a:solidFill>
@@ -6064,7 +6064,7 @@
               </a:spcAft>
             </a:pPr>
             <a:r>
-              <a:rPr sz="850" b="0" i="0">
+              <a:rPr sz="850" b="0">
                 <a:solidFill>
                   <a:srgbClr val="667085"/>
                 </a:solidFill>
@@ -6204,7 +6204,7 @@
               </a:spcAft>
             </a:pPr>
             <a:r>
-              <a:rPr sz="950" b="0" i="0">
+              <a:rPr sz="950" b="0">
                 <a:solidFill>
                   <a:srgbClr val="1A2332"/>
                 </a:solidFill>
@@ -6220,7 +6220,7 @@
               </a:spcAft>
             </a:pPr>
             <a:r>
-              <a:rPr sz="950" b="0" i="0">
+              <a:rPr sz="950" b="0">
                 <a:solidFill>
                   <a:srgbClr val="1A2332"/>
                 </a:solidFill>
@@ -6236,7 +6236,7 @@
               </a:spcAft>
             </a:pPr>
             <a:r>
-              <a:rPr sz="950" b="0" i="0">
+              <a:rPr sz="950" b="0">
                 <a:solidFill>
                   <a:srgbClr val="1A2332"/>
                 </a:solidFill>
@@ -6252,7 +6252,7 @@
               </a:spcAft>
             </a:pPr>
             <a:r>
-              <a:rPr sz="950" b="0" i="0">
+              <a:rPr sz="950" b="0">
                 <a:solidFill>
                   <a:srgbClr val="1A2332"/>
                 </a:solidFill>
@@ -6268,7 +6268,7 @@
               </a:spcAft>
             </a:pPr>
             <a:r>
-              <a:rPr sz="950" b="0" i="0">
+              <a:rPr sz="950" b="0">
                 <a:solidFill>
                   <a:srgbClr val="1A2332"/>
                 </a:solidFill>
@@ -6284,7 +6284,7 @@
               </a:spcAft>
             </a:pPr>
             <a:r>
-              <a:rPr sz="950" b="0" i="0">
+              <a:rPr sz="950" b="0">
                 <a:solidFill>
                   <a:srgbClr val="1A2332"/>
                 </a:solidFill>
@@ -6300,7 +6300,7 @@
               </a:spcAft>
             </a:pPr>
             <a:r>
-              <a:rPr sz="950" b="0" i="0">
+              <a:rPr sz="950" b="0">
                 <a:solidFill>
                   <a:srgbClr val="1A2332"/>
                 </a:solidFill>
@@ -6316,7 +6316,7 @@
               </a:spcAft>
             </a:pPr>
             <a:r>
-              <a:rPr sz="950" b="0" i="0">
+              <a:rPr sz="950" b="0">
                 <a:solidFill>
                   <a:srgbClr val="1A2332"/>
                 </a:solidFill>
@@ -6332,7 +6332,7 @@
               </a:spcAft>
             </a:pPr>
             <a:r>
-              <a:rPr sz="950" b="0" i="0">
+              <a:rPr sz="950" b="0">
                 <a:solidFill>
                   <a:srgbClr val="1A2332"/>
                 </a:solidFill>
@@ -6348,7 +6348,7 @@
               </a:spcAft>
             </a:pPr>
             <a:r>
-              <a:rPr sz="950" b="0" i="0">
+              <a:rPr sz="950" b="0">
                 <a:solidFill>
                   <a:srgbClr val="1A2332"/>
                 </a:solidFill>
@@ -6435,7 +6435,7 @@
               </a:spcAft>
             </a:pPr>
             <a:r>
-              <a:rPr sz="1000" b="1" i="0">
+              <a:rPr sz="1000" b="1">
                 <a:solidFill>
                   <a:srgbClr val="667085"/>
                 </a:solidFill>
@@ -6474,7 +6474,7 @@
               </a:spcAft>
             </a:pPr>
             <a:r>
-              <a:rPr sz="900" b="1" i="0">
+              <a:rPr sz="900" b="1">
                 <a:solidFill>
                   <a:srgbClr val="3B7DD8"/>
                 </a:solidFill>
@@ -6513,7 +6513,7 @@
               </a:spcAft>
             </a:pPr>
             <a:r>
-              <a:rPr sz="900" b="0" i="0">
+              <a:rPr sz="900" b="0">
                 <a:solidFill>
                   <a:srgbClr val="1A2332"/>
                 </a:solidFill>
@@ -6552,7 +6552,7 @@
               </a:spcAft>
             </a:pPr>
             <a:r>
-              <a:rPr sz="900" b="1" i="0">
+              <a:rPr sz="900" b="1">
                 <a:solidFill>
                   <a:srgbClr val="3B7DD8"/>
                 </a:solidFill>
@@ -6591,7 +6591,7 @@
               </a:spcAft>
             </a:pPr>
             <a:r>
-              <a:rPr sz="900" b="0" i="0">
+              <a:rPr sz="900" b="0">
                 <a:solidFill>
                   <a:srgbClr val="1A2332"/>
                 </a:solidFill>
@@ -6607,7 +6607,7 @@
               </a:spcAft>
             </a:pPr>
             <a:r>
-              <a:rPr sz="900" b="0" i="0">
+              <a:rPr sz="900" b="0">
                 <a:solidFill>
                   <a:srgbClr val="1A2332"/>
                 </a:solidFill>
@@ -6646,7 +6646,7 @@
               </a:spcAft>
             </a:pPr>
             <a:r>
-              <a:rPr sz="900" b="1" i="0">
+              <a:rPr sz="900" b="1">
                 <a:solidFill>
                   <a:srgbClr val="3B7DD8"/>
                 </a:solidFill>
@@ -6685,7 +6685,7 @@
               </a:spcAft>
             </a:pPr>
             <a:r>
-              <a:rPr sz="900" b="0" i="0">
+              <a:rPr sz="900" b="0">
                 <a:solidFill>
                   <a:srgbClr val="1A2332"/>
                 </a:solidFill>
@@ -6701,7 +6701,7 @@
               </a:spcAft>
             </a:pPr>
             <a:r>
-              <a:rPr sz="900" b="0" i="0">
+              <a:rPr sz="900" b="0">
                 <a:solidFill>
                   <a:srgbClr val="1A2332"/>
                 </a:solidFill>
@@ -6740,7 +6740,7 @@
               </a:spcAft>
             </a:pPr>
             <a:r>
-              <a:rPr sz="900" b="1" i="0">
+              <a:rPr sz="900" b="1">
                 <a:solidFill>
                   <a:srgbClr val="3B7DD8"/>
                 </a:solidFill>
@@ -6779,7 +6779,7 @@
               </a:spcAft>
             </a:pPr>
             <a:r>
-              <a:rPr sz="900" b="0" i="0">
+              <a:rPr sz="900" b="0">
                 <a:solidFill>
                   <a:srgbClr val="1A2332"/>
                 </a:solidFill>
@@ -6818,7 +6818,7 @@
               </a:spcAft>
             </a:pPr>
             <a:r>
-              <a:rPr sz="900" b="1" i="0">
+              <a:rPr sz="900" b="1">
                 <a:solidFill>
                   <a:srgbClr val="3B7DD8"/>
                 </a:solidFill>
@@ -6857,7 +6857,7 @@
               </a:spcAft>
             </a:pPr>
             <a:r>
-              <a:rPr sz="900" b="0" i="0">
+              <a:rPr sz="900" b="0">
                 <a:solidFill>
                   <a:srgbClr val="1A2332"/>
                 </a:solidFill>
@@ -6873,7 +6873,7 @@
               </a:spcAft>
             </a:pPr>
             <a:r>
-              <a:rPr sz="900" b="0" i="0">
+              <a:rPr sz="900" b="0">
                 <a:solidFill>
                   <a:srgbClr val="1A2332"/>
                 </a:solidFill>
@@ -6912,7 +6912,7 @@
               </a:spcAft>
             </a:pPr>
             <a:r>
-              <a:rPr sz="900" b="1" i="0">
+              <a:rPr sz="900" b="1">
                 <a:solidFill>
                   <a:srgbClr val="3B7DD8"/>
                 </a:solidFill>
@@ -6951,7 +6951,7 @@
               </a:spcAft>
             </a:pPr>
             <a:r>
-              <a:rPr sz="900" b="0" i="0">
+              <a:rPr sz="900" b="0">
                 <a:solidFill>
                   <a:srgbClr val="1A2332"/>
                 </a:solidFill>
@@ -6971,7 +6971,7 @@
         <p:spPr>
           <a:xfrm>
             <a:off x="566928" y="4882896"/>
-            <a:ext cx="11064240" cy="274320"/>
+            <a:ext cx="5394960" cy="274320"/>
           </a:xfrm>
           <a:prstGeom prst="rect">
             <a:avLst/>
@@ -6990,7 +6990,7 @@
               </a:spcAft>
             </a:pPr>
             <a:r>
-              <a:rPr sz="1000" b="1" i="0">
+              <a:rPr sz="1000" b="1">
                 <a:solidFill>
                   <a:srgbClr val="667085"/>
                 </a:solidFill>
@@ -7010,7 +7010,7 @@
         <p:spPr>
           <a:xfrm>
             <a:off x="566928" y="5175504"/>
-            <a:ext cx="11064240" cy="841248"/>
+            <a:ext cx="5394960" cy="1097280"/>
           </a:xfrm>
           <a:prstGeom prst="roundRect">
             <a:avLst>
@@ -7047,25 +7047,49 @@
           <a:p>
             <a:pPr algn="l"/>
             <a:r>
-              <a:rPr sz="1000">
+              <a:rPr sz="950">
                 <a:solidFill>
                   <a:srgbClr val="1A2332"/>
                 </a:solidFill>
                 <a:latin typeface="Consolas"/>
               </a:rPr>
-              <a:t>--out DIR     build elsewhere        --clean     wipe the output dir first</a:t>
+              <a:t>--out DIR    build elsewhere</a:t>
             </a:r>
           </a:p>
           <a:p>
             <a:pPr algn="l"/>
             <a:r>
-              <a:rPr sz="1000">
+              <a:rPr sz="950">
                 <a:solidFill>
                   <a:srgbClr val="1A2332"/>
                 </a:solidFill>
                 <a:latin typeface="Consolas"/>
               </a:rPr>
-              <a:t>--port N      override the HTTP port  --no-build  scaffold only, skip mvn</a:t>
+              <a:t>--port N     override the HTTP port</a:t>
+            </a:r>
+          </a:p>
+          <a:p>
+            <a:pPr algn="l"/>
+            <a:r>
+              <a:rPr sz="950">
+                <a:solidFill>
+                  <a:srgbClr val="1A2332"/>
+                </a:solidFill>
+                <a:latin typeface="Consolas"/>
+              </a:rPr>
+              <a:t>--clean      wipe the output dir first</a:t>
+            </a:r>
+          </a:p>
+          <a:p>
+            <a:pPr algn="l"/>
+            <a:r>
+              <a:rPr sz="950">
+                <a:solidFill>
+                  <a:srgbClr val="1A2332"/>
+                </a:solidFill>
+                <a:latin typeface="Consolas"/>
+              </a:rPr>
+              <a:t>--no-build   scaffold only, skip mvn</a:t>
             </a:r>
           </a:p>
         </p:txBody>
@@ -7078,8 +7102,8 @@
         </p:nvSpPr>
         <p:spPr>
           <a:xfrm>
-            <a:off x="566928" y="6236208"/>
-            <a:ext cx="11064240" cy="457200"/>
+            <a:off x="6236208" y="4882896"/>
+            <a:ext cx="5394960" cy="274320"/>
           </a:xfrm>
           <a:prstGeom prst="rect">
             <a:avLst/>
@@ -7098,7 +7122,406 @@
               </a:spcAft>
             </a:pPr>
             <a:r>
-              <a:rPr sz="1050" b="0" i="0">
+              <a:rPr sz="1000" b="1">
+                <a:solidFill>
+                  <a:srgbClr val="667085"/>
+                </a:solidFill>
+                <a:latin typeface="Calibri"/>
+              </a:rPr>
+              <a:t>pom.xml — MAVEN'S BUILD FILE, JAVA'S pyproject.toml</a:t>
+            </a:r>
+          </a:p>
+        </p:txBody>
+      </p:sp>
+      <p:sp>
+        <p:nvSpPr>
+          <p:cNvPr id="31" name="Rounded Rectangle 30"/>
+          <p:cNvSpPr/>
+          <p:nvPr/>
+        </p:nvSpPr>
+        <p:spPr>
+          <a:xfrm>
+            <a:off x="6236208" y="5175504"/>
+            <a:ext cx="5394960" cy="1097280"/>
+          </a:xfrm>
+          <a:prstGeom prst="roundRect">
+            <a:avLst>
+              <a:gd name="adj" fmla="val 5000"/>
+            </a:avLst>
+          </a:prstGeom>
+          <a:solidFill>
+            <a:srgbClr val="FFFFFF"/>
+          </a:solidFill>
+          <a:ln w="15875">
+            <a:solidFill>
+              <a:srgbClr val="D8DEE6"/>
+            </a:solidFill>
+          </a:ln>
+          <a:effectLst/>
+        </p:spPr>
+        <p:style>
+          <a:lnRef idx="1">
+            <a:schemeClr val="accent1"/>
+          </a:lnRef>
+          <a:fillRef idx="3">
+            <a:schemeClr val="accent1"/>
+          </a:fillRef>
+          <a:effectRef idx="2">
+            <a:schemeClr val="accent1"/>
+          </a:effectRef>
+          <a:fontRef idx="minor">
+            <a:schemeClr val="lt1"/>
+          </a:fontRef>
+        </p:style>
+        <p:txBody>
+          <a:bodyPr rtlCol="0" anchor="ctr"/>
+          <a:lstStyle/>
+          <a:p>
+            <a:pPr algn="ctr"/>
+          </a:p>
+        </p:txBody>
+      </p:sp>
+      <p:sp>
+        <p:nvSpPr>
+          <p:cNvPr id="32" name="TextBox 31"/>
+          <p:cNvSpPr txBox="1"/>
+          <p:nvPr/>
+        </p:nvSpPr>
+        <p:spPr>
+          <a:xfrm>
+            <a:off x="6455664" y="5340096"/>
+            <a:ext cx="1051560" cy="201168"/>
+          </a:xfrm>
+          <a:prstGeom prst="rect">
+            <a:avLst/>
+          </a:prstGeom>
+          <a:noFill/>
+        </p:spPr>
+        <p:txBody>
+          <a:bodyPr wrap="square" lIns="0" rIns="0" tIns="0" bIns="0">
+            <a:spAutoFit/>
+          </a:bodyPr>
+          <a:lstStyle/>
+          <a:p>
+            <a:pPr algn="l">
+              <a:spcAft>
+                <a:spcPts val="0"/>
+              </a:spcAft>
+            </a:pPr>
+            <a:r>
+              <a:rPr sz="900" b="1">
+                <a:solidFill>
+                  <a:srgbClr val="3B7DD8"/>
+                </a:solidFill>
+                <a:latin typeface="Calibri"/>
+              </a:rPr>
+              <a:t>identity</a:t>
+            </a:r>
+          </a:p>
+        </p:txBody>
+      </p:sp>
+      <p:sp>
+        <p:nvSpPr>
+          <p:cNvPr id="33" name="TextBox 32"/>
+          <p:cNvSpPr txBox="1"/>
+          <p:nvPr/>
+        </p:nvSpPr>
+        <p:spPr>
+          <a:xfrm>
+            <a:off x="7534656" y="5340096"/>
+            <a:ext cx="3931920" cy="365760"/>
+          </a:xfrm>
+          <a:prstGeom prst="rect">
+            <a:avLst/>
+          </a:prstGeom>
+          <a:noFill/>
+        </p:spPr>
+        <p:txBody>
+          <a:bodyPr wrap="square" lIns="0" rIns="0" tIns="0" bIns="0">
+            <a:spAutoFit/>
+          </a:bodyPr>
+          <a:lstStyle/>
+          <a:p>
+            <a:pPr algn="l">
+              <a:spcAft>
+                <a:spcPts val="0"/>
+              </a:spcAft>
+            </a:pPr>
+            <a:r>
+              <a:rPr sz="900" b="0">
+                <a:solidFill>
+                  <a:srgbClr val="1A2332"/>
+                </a:solidFill>
+                <a:latin typeface="Calibri"/>
+              </a:rPr>
+              <a:t>artifactId derived from the app name</a:t>
+            </a:r>
+          </a:p>
+        </p:txBody>
+      </p:sp>
+      <p:sp>
+        <p:nvSpPr>
+          <p:cNvPr id="34" name="TextBox 33"/>
+          <p:cNvSpPr txBox="1"/>
+          <p:nvPr/>
+        </p:nvSpPr>
+        <p:spPr>
+          <a:xfrm>
+            <a:off x="6455664" y="5559552"/>
+            <a:ext cx="1051560" cy="201168"/>
+          </a:xfrm>
+          <a:prstGeom prst="rect">
+            <a:avLst/>
+          </a:prstGeom>
+          <a:noFill/>
+        </p:spPr>
+        <p:txBody>
+          <a:bodyPr wrap="square" lIns="0" rIns="0" tIns="0" bIns="0">
+            <a:spAutoFit/>
+          </a:bodyPr>
+          <a:lstStyle/>
+          <a:p>
+            <a:pPr algn="l">
+              <a:spcAft>
+                <a:spcPts val="0"/>
+              </a:spcAft>
+            </a:pPr>
+            <a:r>
+              <a:rPr sz="900" b="1">
+                <a:solidFill>
+                  <a:srgbClr val="3B7DD8"/>
+                </a:solidFill>
+                <a:latin typeface="Calibri"/>
+              </a:rPr>
+              <a:t>properties</a:t>
+            </a:r>
+          </a:p>
+        </p:txBody>
+      </p:sp>
+      <p:sp>
+        <p:nvSpPr>
+          <p:cNvPr id="35" name="TextBox 34"/>
+          <p:cNvSpPr txBox="1"/>
+          <p:nvPr/>
+        </p:nvSpPr>
+        <p:spPr>
+          <a:xfrm>
+            <a:off x="7534656" y="5559552"/>
+            <a:ext cx="3931920" cy="365760"/>
+          </a:xfrm>
+          <a:prstGeom prst="rect">
+            <a:avLst/>
+          </a:prstGeom>
+          <a:noFill/>
+        </p:spPr>
+        <p:txBody>
+          <a:bodyPr wrap="square" lIns="0" rIns="0" tIns="0" bIns="0">
+            <a:spAutoFit/>
+          </a:bodyPr>
+          <a:lstStyle/>
+          <a:p>
+            <a:pPr algn="l">
+              <a:spcAft>
+                <a:spcPts val="0"/>
+              </a:spcAft>
+            </a:pPr>
+            <a:r>
+              <a:rPr sz="900" b="0">
+                <a:solidFill>
+                  <a:srgbClr val="1A2332"/>
+                </a:solidFill>
+                <a:latin typeface="Calibri"/>
+              </a:rPr>
+              <a:t>pins Kogito 10.2.0 · Quarkus 3.27.2 · JDK 17</a:t>
+            </a:r>
+          </a:p>
+        </p:txBody>
+      </p:sp>
+      <p:sp>
+        <p:nvSpPr>
+          <p:cNvPr id="36" name="TextBox 35"/>
+          <p:cNvSpPr txBox="1"/>
+          <p:nvPr/>
+        </p:nvSpPr>
+        <p:spPr>
+          <a:xfrm>
+            <a:off x="6455664" y="5779008"/>
+            <a:ext cx="1051560" cy="201168"/>
+          </a:xfrm>
+          <a:prstGeom prst="rect">
+            <a:avLst/>
+          </a:prstGeom>
+          <a:noFill/>
+        </p:spPr>
+        <p:txBody>
+          <a:bodyPr wrap="square" lIns="0" rIns="0" tIns="0" bIns="0">
+            <a:spAutoFit/>
+          </a:bodyPr>
+          <a:lstStyle/>
+          <a:p>
+            <a:pPr algn="l">
+              <a:spcAft>
+                <a:spcPts val="0"/>
+              </a:spcAft>
+            </a:pPr>
+            <a:r>
+              <a:rPr sz="900" b="1">
+                <a:solidFill>
+                  <a:srgbClr val="3B7DD8"/>
+                </a:solidFill>
+                <a:latin typeface="Calibri"/>
+              </a:rPr>
+              <a:t>dependencies</a:t>
+            </a:r>
+          </a:p>
+        </p:txBody>
+      </p:sp>
+      <p:sp>
+        <p:nvSpPr>
+          <p:cNvPr id="37" name="TextBox 36"/>
+          <p:cNvSpPr txBox="1"/>
+          <p:nvPr/>
+        </p:nvSpPr>
+        <p:spPr>
+          <a:xfrm>
+            <a:off x="7534656" y="5779008"/>
+            <a:ext cx="3931920" cy="365760"/>
+          </a:xfrm>
+          <a:prstGeom prst="rect">
+            <a:avLst/>
+          </a:prstGeom>
+          <a:noFill/>
+        </p:spPr>
+        <p:txBody>
+          <a:bodyPr wrap="square" lIns="0" rIns="0" tIns="0" bIns="0">
+            <a:spAutoFit/>
+          </a:bodyPr>
+          <a:lstStyle/>
+          <a:p>
+            <a:pPr algn="l">
+              <a:spcAft>
+                <a:spcPts val="0"/>
+              </a:spcAft>
+            </a:pPr>
+            <a:r>
+              <a:rPr sz="900" b="0">
+                <a:solidFill>
+                  <a:srgbClr val="1A2332"/>
+                </a:solidFill>
+                <a:latin typeface="Calibri"/>
+              </a:rPr>
+              <a:t>engine, REST, management, Data Index (BOM-versioned)</a:t>
+            </a:r>
+          </a:p>
+        </p:txBody>
+      </p:sp>
+      <p:sp>
+        <p:nvSpPr>
+          <p:cNvPr id="38" name="TextBox 37"/>
+          <p:cNvSpPr txBox="1"/>
+          <p:nvPr/>
+        </p:nvSpPr>
+        <p:spPr>
+          <a:xfrm>
+            <a:off x="6455664" y="5998464"/>
+            <a:ext cx="1051560" cy="201168"/>
+          </a:xfrm>
+          <a:prstGeom prst="rect">
+            <a:avLst/>
+          </a:prstGeom>
+          <a:noFill/>
+        </p:spPr>
+        <p:txBody>
+          <a:bodyPr wrap="square" lIns="0" rIns="0" tIns="0" bIns="0">
+            <a:spAutoFit/>
+          </a:bodyPr>
+          <a:lstStyle/>
+          <a:p>
+            <a:pPr algn="l">
+              <a:spcAft>
+                <a:spcPts val="0"/>
+              </a:spcAft>
+            </a:pPr>
+            <a:r>
+              <a:rPr sz="900" b="1">
+                <a:solidFill>
+                  <a:srgbClr val="3B7DD8"/>
+                </a:solidFill>
+                <a:latin typeface="Calibri"/>
+              </a:rPr>
+              <a:t>build plugin</a:t>
+            </a:r>
+          </a:p>
+        </p:txBody>
+      </p:sp>
+      <p:sp>
+        <p:nvSpPr>
+          <p:cNvPr id="39" name="TextBox 38"/>
+          <p:cNvSpPr txBox="1"/>
+          <p:nvPr/>
+        </p:nvSpPr>
+        <p:spPr>
+          <a:xfrm>
+            <a:off x="7534656" y="5998464"/>
+            <a:ext cx="3931920" cy="365760"/>
+          </a:xfrm>
+          <a:prstGeom prst="rect">
+            <a:avLst/>
+          </a:prstGeom>
+          <a:noFill/>
+        </p:spPr>
+        <p:txBody>
+          <a:bodyPr wrap="square" lIns="0" rIns="0" tIns="0" bIns="0">
+            <a:spAutoFit/>
+          </a:bodyPr>
+          <a:lstStyle/>
+          <a:p>
+            <a:pPr algn="l">
+              <a:spcAft>
+                <a:spcPts val="0"/>
+              </a:spcAft>
+            </a:pPr>
+            <a:r>
+              <a:rPr sz="900" b="0">
+                <a:solidFill>
+                  <a:srgbClr val="1A2332"/>
+                </a:solidFill>
+                <a:latin typeface="Calibri"/>
+              </a:rPr>
+              <a:t>quarkus-maven-plugin: codegen, then the jar</a:t>
+            </a:r>
+          </a:p>
+        </p:txBody>
+      </p:sp>
+      <p:sp>
+        <p:nvSpPr>
+          <p:cNvPr id="40" name="TextBox 39"/>
+          <p:cNvSpPr txBox="1"/>
+          <p:nvPr/>
+        </p:nvSpPr>
+        <p:spPr>
+          <a:xfrm>
+            <a:off x="566928" y="6345936"/>
+            <a:ext cx="11064240" cy="457200"/>
+          </a:xfrm>
+          <a:prstGeom prst="rect">
+            <a:avLst/>
+          </a:prstGeom>
+          <a:noFill/>
+        </p:spPr>
+        <p:txBody>
+          <a:bodyPr wrap="square" lIns="0" rIns="0" tIns="0" bIns="0">
+            <a:spAutoFit/>
+          </a:bodyPr>
+          <a:lstStyle/>
+          <a:p>
+            <a:pPr algn="l">
+              <a:spcAft>
+                <a:spcPts val="0"/>
+              </a:spcAft>
+            </a:pPr>
+            <a:r>
+              <a:rPr sz="1050" b="0">
                 <a:solidFill>
                   <a:srgbClr val="1A2332"/>
                 </a:solidFill>
@@ -7155,7 +7578,7 @@
               </a:spcAft>
             </a:pPr>
             <a:r>
-              <a:rPr sz="1050" b="1" i="0">
+              <a:rPr sz="1050" b="1">
                 <a:solidFill>
                   <a:srgbClr val="3B7DD8"/>
                 </a:solidFill>
@@ -7194,7 +7617,7 @@
               </a:spcAft>
             </a:pPr>
             <a:r>
-              <a:rPr sz="2800" b="1" i="0">
+              <a:rPr sz="2800" b="1">
                 <a:solidFill>
                   <a:srgbClr val="1A2332"/>
                 </a:solidFill>
@@ -7277,7 +7700,7 @@
               </a:spcAft>
             </a:pPr>
             <a:r>
-              <a:rPr sz="1250" b="0" i="0">
+              <a:rPr sz="1250" b="0">
                 <a:solidFill>
                   <a:srgbClr val="667085"/>
                 </a:solidFill>
@@ -7469,7 +7892,7 @@
               </a:spcAft>
             </a:pPr>
             <a:r>
-              <a:rPr sz="1000" b="1" i="0">
+              <a:rPr sz="1000" b="1">
                 <a:solidFill>
                   <a:srgbClr val="D8913B"/>
                 </a:solidFill>
@@ -7508,7 +7931,7 @@
               </a:spcAft>
             </a:pPr>
             <a:r>
-              <a:rPr sz="950" b="0" i="0">
+              <a:rPr sz="950" b="0">
                 <a:solidFill>
                   <a:srgbClr val="1A2332"/>
                 </a:solidFill>
@@ -7547,7 +7970,7 @@
               </a:spcAft>
             </a:pPr>
             <a:r>
-              <a:rPr sz="1000" b="1" i="0">
+              <a:rPr sz="1000" b="1">
                 <a:solidFill>
                   <a:srgbClr val="667085"/>
                 </a:solidFill>
@@ -7751,7 +8174,7 @@
               </a:spcAft>
             </a:pPr>
             <a:r>
-              <a:rPr sz="1000" b="1" i="0">
+              <a:rPr sz="1000" b="1">
                 <a:solidFill>
                   <a:srgbClr val="667085"/>
                 </a:solidFill>
@@ -7790,7 +8213,7 @@
               </a:spcAft>
             </a:pPr>
             <a:r>
-              <a:rPr sz="950" b="1" i="0">
+              <a:rPr sz="950" b="1">
                 <a:solidFill>
                   <a:srgbClr val="1A2332"/>
                 </a:solidFill>
@@ -7829,7 +8252,7 @@
               </a:spcAft>
             </a:pPr>
             <a:r>
-              <a:rPr sz="950" b="0" i="0">
+              <a:rPr sz="950" b="0">
                 <a:solidFill>
                   <a:srgbClr val="667085"/>
                 </a:solidFill>
@@ -7868,7 +8291,7 @@
               </a:spcAft>
             </a:pPr>
             <a:r>
-              <a:rPr sz="950" b="1" i="0">
+              <a:rPr sz="950" b="1">
                 <a:solidFill>
                   <a:srgbClr val="1A2332"/>
                 </a:solidFill>
@@ -7907,7 +8330,7 @@
               </a:spcAft>
             </a:pPr>
             <a:r>
-              <a:rPr sz="950" b="0" i="0">
+              <a:rPr sz="950" b="0">
                 <a:solidFill>
                   <a:srgbClr val="667085"/>
                 </a:solidFill>
@@ -7946,7 +8369,7 @@
               </a:spcAft>
             </a:pPr>
             <a:r>
-              <a:rPr sz="950" b="1" i="0">
+              <a:rPr sz="950" b="1">
                 <a:solidFill>
                   <a:srgbClr val="1A2332"/>
                 </a:solidFill>
@@ -7985,7 +8408,7 @@
               </a:spcAft>
             </a:pPr>
             <a:r>
-              <a:rPr sz="950" b="0" i="0">
+              <a:rPr sz="950" b="0">
                 <a:solidFill>
                   <a:srgbClr val="667085"/>
                 </a:solidFill>
@@ -8024,7 +8447,7 @@
               </a:spcAft>
             </a:pPr>
             <a:r>
-              <a:rPr sz="950" b="1" i="0">
+              <a:rPr sz="950" b="1">
                 <a:solidFill>
                   <a:srgbClr val="1A2332"/>
                 </a:solidFill>
@@ -8063,7 +8486,7 @@
               </a:spcAft>
             </a:pPr>
             <a:r>
-              <a:rPr sz="950" b="0" i="0">
+              <a:rPr sz="950" b="0">
                 <a:solidFill>
                   <a:srgbClr val="667085"/>
                 </a:solidFill>
@@ -8102,7 +8525,7 @@
               </a:spcAft>
             </a:pPr>
             <a:r>
-              <a:rPr sz="1050" b="0" i="0">
+              <a:rPr sz="1050" b="0">
                 <a:solidFill>
                   <a:srgbClr val="1A2332"/>
                 </a:solidFill>
